--- a/docs/保安林確認_岡崎市板田町.pptx
+++ b/docs/保安林確認_岡崎市板田町.pptx
@@ -12,9 +12,10 @@
     <p:sldId id="260" r:id="rId6"/>
     <p:sldId id="261" r:id="rId7"/>
     <p:sldId id="262" r:id="rId8"/>
+    <p:sldId id="263" r:id="rId9"/>
   </p:sldIdLst>
   <p:notesMasterIdLst>
-    <p:notesMasterId r:id="rId9"/>
+    <p:notesMasterId r:id="rId10"/>
   </p:notesMasterIdLst>
   <p:sldSz cx="12192000" cy="6858000"/>
   <p:notesSz cx="6858000" cy="12192000"/>
@@ -1060,6 +1061,94 @@
             <a:fld id="{F7021451-1387-4CA6-816F-3879F97B5CBC}" type="slidenum">
               <a:rPr lang="en-US"/>
               <a:t>7</a:t>
+            </a:fld>
+            <a:endParaRPr lang="en-US"/>
+          </a:p>
+        </p:txBody>
+      </p:sp>
+    </p:spTree>
+    <p:extLst>
+      <p:ext uri="{BB962C8B-B14F-4D97-AF65-F5344CB8AC3E}">
+        <p14:creationId xmlns:p14="http://schemas.microsoft.com/office/powerpoint/2010/main" val="1024086991"/>
+      </p:ext>
+    </p:extLst>
+  </p:cSld>
+  <p:clrMapOvr>
+    <a:masterClrMapping/>
+  </p:clrMapOvr>
+</p:notes>
+</file>
+
+<file path=ppt/notesSlides/notesSlide8.xml><?xml version="1.0" encoding="utf-8"?>
+<p:notes xmlns:a="http://schemas.openxmlformats.org/drawingml/2006/main" xmlns:r="http://schemas.openxmlformats.org/officeDocument/2006/relationships" xmlns:p="http://schemas.openxmlformats.org/presentationml/2006/main">
+  <p:cSld>
+    <p:spTree>
+      <p:nvGrpSpPr>
+        <p:cNvPr id="1" name=""/>
+        <p:cNvGrpSpPr/>
+        <p:nvPr/>
+      </p:nvGrpSpPr>
+      <p:grpSpPr>
+        <a:xfrm>
+          <a:off x="0" y="0"/>
+          <a:ext cx="0" cy="0"/>
+          <a:chOff x="0" y="0"/>
+          <a:chExt cx="0" cy="0"/>
+        </a:xfrm>
+      </p:grpSpPr>
+      <p:sp>
+        <p:nvSpPr>
+          <p:cNvPr id="2" name="Slide Image Placeholder 1"/>
+          <p:cNvSpPr>
+            <a:spLocks noGrp="1" noRot="1" noChangeAspect="1"/>
+          </p:cNvSpPr>
+          <p:nvPr>
+            <p:ph type="sldImg"/>
+          </p:nvPr>
+        </p:nvSpPr>
+        <p:spPr/>
+      </p:sp>
+      <p:sp>
+        <p:nvSpPr>
+          <p:cNvPr id="3" name="Notes Placeholder 2"/>
+          <p:cNvSpPr>
+            <a:spLocks noGrp="1"/>
+          </p:cNvSpPr>
+          <p:nvPr>
+            <p:ph type="body" idx="1"/>
+          </p:nvPr>
+        </p:nvSpPr>
+        <p:spPr/>
+        <p:txBody>
+          <a:bodyPr/>
+          <a:lstStyle/>
+          <a:p>
+            <a:r>
+              <a:rPr lang="en-US" dirty="0"/>
+              <a:t/>
+            </a:r>
+            <a:endParaRPr lang="en-US" dirty="0"/>
+          </a:p>
+        </p:txBody>
+      </p:sp>
+      <p:sp>
+        <p:nvSpPr>
+          <p:cNvPr id="4" name="Slide Number Placeholder 3"/>
+          <p:cNvSpPr>
+            <a:spLocks noGrp="1"/>
+          </p:cNvSpPr>
+          <p:nvPr>
+            <p:ph type="sldNum" sz="quarter" idx="10"/>
+          </p:nvPr>
+        </p:nvSpPr>
+        <p:spPr/>
+        <p:txBody>
+          <a:bodyPr/>
+          <a:lstStyle/>
+          <a:p>
+            <a:fld id="{F7021451-1387-4CA6-816F-3879F97B5CBC}" type="slidenum">
+              <a:rPr lang="en-US"/>
+              <a:t>8</a:t>
             </a:fld>
             <a:endParaRPr lang="en-US"/>
           </a:p>
@@ -2101,7 +2190,7 @@
                 <a:ea typeface="Cambria" pitchFamily="34" charset="-122"/>
                 <a:cs typeface="Cambria" pitchFamily="34" charset="-120"/>
               </a:rPr>
-              <a:t>約30</a:t>
+              <a:t>33</a:t>
             </a:r>
             <a:endParaRPr lang="en-US" sz="2600" dirty="0"/>
           </a:p>
@@ -2179,7 +2268,7 @@
                 <a:ea typeface="Calibri" pitchFamily="34" charset="-122"/>
                 <a:cs typeface="Calibri" pitchFamily="34" charset="-120"/>
               </a:rPr>
-              <a:t>登記簿が未提出（求積図に記載）</a:t>
+              <a:t>案件地だが地目未確認</a:t>
             </a:r>
             <a:endParaRPr lang="en-US" sz="1150" dirty="0"/>
           </a:p>
@@ -2644,7 +2733,7 @@
                 <a:ea typeface="Calibri" pitchFamily="34" charset="-122"/>
                 <a:cs typeface="Calibri" pitchFamily="34" charset="-120"/>
               </a:rPr>
-              <a:t>求積図には1番台を中心に約30筆が記載されているが、今回の登記簿には含まれていない。</a:t>
+              <a:t>公図では案件地は60筆・約86,300㎡。うち33筆・約45,900㎡は登記簿が未取得で地目が分からない。</a:t>
             </a:r>
             <a:endParaRPr lang="en-US" sz="1150" dirty="0"/>
           </a:p>
@@ -8660,7 +8749,7 @@
                 <a:ea typeface="Cambria" pitchFamily="34" charset="-122"/>
                 <a:cs typeface="Cambria" pitchFamily="34" charset="-120"/>
               </a:rPr>
-              <a:t>位置関係と公開データの限界</a:t>
+              <a:t>筆界図で見る保安林の分布</a:t>
             </a:r>
             <a:endParaRPr lang="en-US" sz="3200" dirty="0"/>
           </a:p>
@@ -8699,7 +8788,7 @@
                 <a:ea typeface="Calibri" pitchFamily="34" charset="-122"/>
                 <a:cs typeface="Calibri" pitchFamily="34" charset="-120"/>
               </a:rPr>
-              <a:t>国土数値情報の保安林ポリゴンは対象座標を含まないが、登記簿の実態とは一致しない</a:t>
+              <a:t>法務省 登記所備付地図データ（2026年）で字東流石119筆を描画。案件地は60筆・約86,300㎡</a:t>
             </a:r>
             <a:endParaRPr lang="en-US" sz="1300" dirty="0"/>
           </a:p>
@@ -8707,7 +8796,7 @@
       </p:sp>
       <p:pic>
         <p:nvPicPr>
-          <p:cNvPr id="4" name="Image 0" descr="map_zoom.png">    </p:cNvPr>
+          <p:cNvPr id="4" name="Image 0" descr="fude_map.png">    </p:cNvPr>
           <p:cNvPicPr>
             <a:picLocks noChangeAspect="1"/>
           </p:cNvPicPr>
@@ -8722,55 +8811,70 @@
         <p:spPr>
           <a:xfrm>
             <a:off x="548640" y="1463040"/>
-            <a:ext cx="4160520" cy="4160520"/>
+            <a:ext cx="5669280" cy="4617720"/>
           </a:xfrm>
           <a:prstGeom prst="rect">
             <a:avLst/>
           </a:prstGeom>
         </p:spPr>
       </p:pic>
-      <p:pic>
-        <p:nvPicPr>
-          <p:cNvPr id="5" name="Image 1" descr="map_wide.png">    </p:cNvPr>
-          <p:cNvPicPr>
-            <a:picLocks noChangeAspect="1"/>
-          </p:cNvPicPr>
-          <p:nvPr/>
-        </p:nvPicPr>
-        <p:blipFill>
-          <a:blip r:embed="rId2"/>
-          <a:stretch>
-            <a:fillRect/>
-          </a:stretch>
-        </p:blipFill>
-        <p:spPr>
-          <a:xfrm>
-            <a:off x="4892040" y="1463040"/>
-            <a:ext cx="4160520" cy="4160520"/>
+      <p:sp>
+        <p:nvSpPr>
+          <p:cNvPr id="5" name="Text 2"/>
+          <p:cNvSpPr txBox="1"/>
+          <p:nvPr/>
+        </p:nvSpPr>
+        <p:spPr>
+          <a:xfrm>
+            <a:off x="6537960" y="1481328"/>
+            <a:ext cx="5074920" cy="310896"/>
           </a:xfrm>
           <a:prstGeom prst="rect">
             <a:avLst/>
           </a:prstGeom>
-        </p:spPr>
-      </p:pic>
-      <p:sp>
-        <p:nvSpPr>
-          <p:cNvPr id="6" name="Shape 2"/>
+          <a:noFill/>
+          <a:ln/>
+        </p:spPr>
+        <p:txBody>
+          <a:bodyPr wrap="square" lIns="0" tIns="0" rIns="0" bIns="0" rtlCol="0" anchor="ctr"/>
+          <a:lstStyle/>
+          <a:p>
+            <a:pPr indent="0" marL="0">
+              <a:buNone/>
+            </a:pPr>
+            <a:r>
+              <a:rPr lang="en-US" sz="1600" b="1" dirty="0">
+                <a:solidFill>
+                  <a:srgbClr val="2C5F2D"/>
+                </a:solidFill>
+                <a:latin typeface="Cambria" pitchFamily="34" charset="0"/>
+                <a:ea typeface="Cambria" pitchFamily="34" charset="-122"/>
+                <a:cs typeface="Cambria" pitchFamily="34" charset="-120"/>
+              </a:rPr>
+              <a:t>図から分かること</a:t>
+            </a:r>
+            <a:endParaRPr lang="en-US" sz="1600" dirty="0"/>
+          </a:p>
+        </p:txBody>
+      </p:sp>
+      <p:sp>
+        <p:nvSpPr>
+          <p:cNvPr id="6" name="Shape 3"/>
           <p:cNvSpPr/>
           <p:nvPr/>
         </p:nvSpPr>
         <p:spPr>
           <a:xfrm>
-            <a:off x="9281160" y="1463040"/>
-            <a:ext cx="2331720" cy="4160520"/>
+            <a:off x="6537960" y="1901952"/>
+            <a:ext cx="5074920" cy="914400"/>
           </a:xfrm>
           <a:prstGeom prst="roundRect">
             <a:avLst>
-              <a:gd name="adj" fmla="val 2353"/>
+              <a:gd name="adj" fmla="val 6000"/>
             </a:avLst>
           </a:prstGeom>
           <a:solidFill>
-            <a:srgbClr val="EDF2E6"/>
+            <a:srgbClr val="F7F9F4"/>
           </a:solidFill>
           <a:ln w="12700">
             <a:solidFill>
@@ -8782,14 +8886,39 @@
       </p:sp>
       <p:sp>
         <p:nvSpPr>
-          <p:cNvPr id="7" name="Text 3"/>
+          <p:cNvPr id="7" name="Shape 4"/>
+          <p:cNvSpPr/>
+          <p:nvPr/>
+        </p:nvSpPr>
+        <p:spPr>
+          <a:xfrm>
+            <a:off x="6748272" y="2075688"/>
+            <a:ext cx="237744" cy="237744"/>
+          </a:xfrm>
+          <a:prstGeom prst="ellipse">
+            <a:avLst/>
+          </a:prstGeom>
+          <a:solidFill>
+            <a:srgbClr val="B02A1F"/>
+          </a:solidFill>
+          <a:ln w="12700">
+            <a:solidFill>
+              <a:srgbClr val="B02A1F"/>
+            </a:solidFill>
+            <a:prstDash val="solid"/>
+          </a:ln>
+        </p:spPr>
+      </p:sp>
+      <p:sp>
+        <p:nvSpPr>
+          <p:cNvPr id="8" name="Text 5"/>
           <p:cNvSpPr txBox="1"/>
           <p:nvPr/>
         </p:nvSpPr>
         <p:spPr>
           <a:xfrm>
-            <a:off x="9509760" y="1645920"/>
-            <a:ext cx="1920240" cy="274320"/>
+            <a:off x="7086600" y="2029968"/>
+            <a:ext cx="4389120" cy="292608"/>
           </a:xfrm>
           <a:prstGeom prst="rect">
             <a:avLst/>
@@ -8805,50 +8934,7 @@
               <a:buNone/>
             </a:pPr>
             <a:r>
-              <a:rPr lang="en-US" sz="1400" b="1" dirty="0">
-                <a:solidFill>
-                  <a:srgbClr val="2C5F2D"/>
-                </a:solidFill>
-                <a:latin typeface="Cambria" pitchFamily="34" charset="0"/>
-                <a:ea typeface="Cambria" pitchFamily="34" charset="-122"/>
-                <a:cs typeface="Cambria" pitchFamily="34" charset="-120"/>
-              </a:rPr>
-              <a:t>読み取りかた</a:t>
-            </a:r>
-            <a:endParaRPr lang="en-US" sz="1400" dirty="0"/>
-          </a:p>
-        </p:txBody>
-      </p:sp>
-      <p:sp>
-        <p:nvSpPr>
-          <p:cNvPr id="8" name="Text 4"/>
-          <p:cNvSpPr txBox="1"/>
-          <p:nvPr/>
-        </p:nvSpPr>
-        <p:spPr>
-          <a:xfrm>
-            <a:off x="9509760" y="2011680"/>
-            <a:ext cx="1920240" cy="3474720"/>
-          </a:xfrm>
-          <a:prstGeom prst="rect">
-            <a:avLst/>
-          </a:prstGeom>
-          <a:noFill/>
-          <a:ln/>
-        </p:spPr>
-        <p:txBody>
-          <a:bodyPr wrap="square" lIns="0" tIns="0" rIns="0" bIns="0" rtlCol="0" anchor="t"/>
-          <a:lstStyle/>
-          <a:p>
-            <a:pPr marL="342900" indent="-342900">
-              <a:spcAft>
-                <a:spcPts val="900"/>
-              </a:spcAft>
-              <a:buSzPct val="100000"/>
-              <a:buChar char="•"/>
-            </a:pPr>
-            <a:r>
-              <a:rPr lang="en-US" sz="1050" dirty="0">
+              <a:rPr lang="en-US" sz="1250" b="1" dirty="0">
                 <a:solidFill>
                   <a:srgbClr val="222B22"/>
                 </a:solidFill>
@@ -8856,20 +8942,129 @@
                 <a:ea typeface="Calibri" pitchFamily="34" charset="-122"/>
                 <a:cs typeface="Calibri" pitchFamily="34" charset="-120"/>
               </a:rPr>
-              <a:t>公開データ（A13）上、対象座標から保安林境界まで約37m。</a:t>
+              <a:t>保安林は北ブロックと東縁に集中</a:t>
             </a:r>
-            <a:endParaRPr lang="en-US" sz="1050" dirty="0"/>
-          </a:p>
-          <a:p>
-            <a:pPr marL="342900" indent="-342900">
-              <a:spcAft>
-                <a:spcPts val="900"/>
-              </a:spcAft>
-              <a:buSzPct val="100000"/>
-              <a:buChar char="•"/>
+            <a:endParaRPr lang="en-US" sz="1250" dirty="0"/>
+          </a:p>
+        </p:txBody>
+      </p:sp>
+      <p:sp>
+        <p:nvSpPr>
+          <p:cNvPr id="9" name="Text 6"/>
+          <p:cNvSpPr txBox="1"/>
+          <p:nvPr/>
+        </p:nvSpPr>
+        <p:spPr>
+          <a:xfrm>
+            <a:off x="7086600" y="2322576"/>
+            <a:ext cx="4343400" cy="457200"/>
+          </a:xfrm>
+          <a:prstGeom prst="rect">
+            <a:avLst/>
+          </a:prstGeom>
+          <a:noFill/>
+          <a:ln/>
+        </p:spPr>
+        <p:txBody>
+          <a:bodyPr wrap="square" lIns="0" tIns="0" rIns="0" bIns="0" rtlCol="0" anchor="t"/>
+          <a:lstStyle/>
+          <a:p>
+            <a:pPr indent="0" marL="0">
+              <a:buNone/>
             </a:pPr>
             <a:r>
-              <a:rPr lang="en-US" sz="1050" dirty="0">
+              <a:rPr lang="en-US" sz="1000" dirty="0">
+                <a:solidFill>
+                  <a:srgbClr val="6B7A66"/>
+                </a:solidFill>
+                <a:latin typeface="Calibri" pitchFamily="34" charset="0"/>
+                <a:ea typeface="Calibri" pitchFamily="34" charset="-122"/>
+                <a:cs typeface="Calibri" pitchFamily="34" charset="-120"/>
+              </a:rPr>
+              <a:t>11番・22番台・26番2・27番台がまとまって北側を占め、22番1・22番8・1番8が東縁を構成する。案件地の骨格部分に重なっている。</a:t>
+            </a:r>
+            <a:endParaRPr lang="en-US" sz="1000" dirty="0"/>
+          </a:p>
+        </p:txBody>
+      </p:sp>
+      <p:sp>
+        <p:nvSpPr>
+          <p:cNvPr id="10" name="Shape 7"/>
+          <p:cNvSpPr/>
+          <p:nvPr/>
+        </p:nvSpPr>
+        <p:spPr>
+          <a:xfrm>
+            <a:off x="6537960" y="2962656"/>
+            <a:ext cx="5074920" cy="914400"/>
+          </a:xfrm>
+          <a:prstGeom prst="roundRect">
+            <a:avLst>
+              <a:gd name="adj" fmla="val 6000"/>
+            </a:avLst>
+          </a:prstGeom>
+          <a:solidFill>
+            <a:srgbClr val="F7F9F4"/>
+          </a:solidFill>
+          <a:ln w="12700">
+            <a:solidFill>
+              <a:srgbClr val="D3DEC7"/>
+            </a:solidFill>
+            <a:prstDash val="solid"/>
+          </a:ln>
+        </p:spPr>
+      </p:sp>
+      <p:sp>
+        <p:nvSpPr>
+          <p:cNvPr id="11" name="Shape 8"/>
+          <p:cNvSpPr/>
+          <p:nvPr/>
+        </p:nvSpPr>
+        <p:spPr>
+          <a:xfrm>
+            <a:off x="6748272" y="3136392"/>
+            <a:ext cx="237744" cy="237744"/>
+          </a:xfrm>
+          <a:prstGeom prst="ellipse">
+            <a:avLst/>
+          </a:prstGeom>
+          <a:solidFill>
+            <a:srgbClr val="B02A1F"/>
+          </a:solidFill>
+          <a:ln w="12700">
+            <a:solidFill>
+              <a:srgbClr val="B02A1F"/>
+            </a:solidFill>
+            <a:prstDash val="solid"/>
+          </a:ln>
+        </p:spPr>
+      </p:sp>
+      <p:sp>
+        <p:nvSpPr>
+          <p:cNvPr id="12" name="Text 9"/>
+          <p:cNvSpPr txBox="1"/>
+          <p:nvPr/>
+        </p:nvSpPr>
+        <p:spPr>
+          <a:xfrm>
+            <a:off x="7086600" y="3090672"/>
+            <a:ext cx="4389120" cy="292608"/>
+          </a:xfrm>
+          <a:prstGeom prst="rect">
+            <a:avLst/>
+          </a:prstGeom>
+          <a:noFill/>
+          <a:ln/>
+        </p:spPr>
+        <p:txBody>
+          <a:bodyPr wrap="square" lIns="0" tIns="0" rIns="0" bIns="0" rtlCol="0" anchor="ctr"/>
+          <a:lstStyle/>
+          <a:p>
+            <a:pPr indent="0" marL="0">
+              <a:buNone/>
+            </a:pPr>
+            <a:r>
+              <a:rPr lang="en-US" sz="1250" b="1" dirty="0">
                 <a:solidFill>
                   <a:srgbClr val="222B22"/>
                 </a:solidFill>
@@ -8877,20 +9072,129 @@
                 <a:ea typeface="Calibri" pitchFamily="34" charset="-122"/>
                 <a:cs typeface="Calibri" pitchFamily="34" charset="-120"/>
               </a:rPr>
-              <a:t>しかし登記簿では対象地の15筆が地目「保安林」。</a:t>
+              <a:t>保安林の実面積は約2.86ha</a:t>
             </a:r>
-            <a:endParaRPr lang="en-US" sz="1050" dirty="0"/>
-          </a:p>
-          <a:p>
-            <a:pPr marL="342900" indent="-342900">
-              <a:spcAft>
-                <a:spcPts val="900"/>
-              </a:spcAft>
-              <a:buSzPct val="100000"/>
-              <a:buChar char="•"/>
+            <a:endParaRPr lang="en-US" sz="1250" dirty="0"/>
+          </a:p>
+        </p:txBody>
+      </p:sp>
+      <p:sp>
+        <p:nvSpPr>
+          <p:cNvPr id="13" name="Text 10"/>
+          <p:cNvSpPr txBox="1"/>
+          <p:nvPr/>
+        </p:nvSpPr>
+        <p:spPr>
+          <a:xfrm>
+            <a:off x="7086600" y="3383280"/>
+            <a:ext cx="4343400" cy="457200"/>
+          </a:xfrm>
+          <a:prstGeom prst="rect">
+            <a:avLst/>
+          </a:prstGeom>
+          <a:noFill/>
+          <a:ln/>
+        </p:spPr>
+        <p:txBody>
+          <a:bodyPr wrap="square" lIns="0" tIns="0" rIns="0" bIns="0" rtlCol="0" anchor="t"/>
+          <a:lstStyle/>
+          <a:p>
+            <a:pPr indent="0" marL="0">
+              <a:buNone/>
             </a:pPr>
             <a:r>
-              <a:rPr lang="en-US" sz="1050" dirty="0">
+              <a:rPr lang="en-US" sz="1000" dirty="0">
+                <a:solidFill>
+                  <a:srgbClr val="6B7A66"/>
+                </a:solidFill>
+                <a:latin typeface="Calibri" pitchFamily="34" charset="0"/>
+                <a:ea typeface="Calibri" pitchFamily="34" charset="-122"/>
+                <a:cs typeface="Calibri" pitchFamily="34" charset="-120"/>
+              </a:rPr>
+              <a:t>公図面積 28,576㎡。登記地積の合計1.82haより約1ha大きい。山林の縄伸びによるもので、実際に規制がかかる範囲はこちらに近い。</a:t>
+            </a:r>
+            <a:endParaRPr lang="en-US" sz="1000" dirty="0"/>
+          </a:p>
+        </p:txBody>
+      </p:sp>
+      <p:sp>
+        <p:nvSpPr>
+          <p:cNvPr id="14" name="Shape 11"/>
+          <p:cNvSpPr/>
+          <p:nvPr/>
+        </p:nvSpPr>
+        <p:spPr>
+          <a:xfrm>
+            <a:off x="6537960" y="4023360"/>
+            <a:ext cx="5074920" cy="914400"/>
+          </a:xfrm>
+          <a:prstGeom prst="roundRect">
+            <a:avLst>
+              <a:gd name="adj" fmla="val 6000"/>
+            </a:avLst>
+          </a:prstGeom>
+          <a:solidFill>
+            <a:srgbClr val="F7F9F4"/>
+          </a:solidFill>
+          <a:ln w="12700">
+            <a:solidFill>
+              <a:srgbClr val="D3DEC7"/>
+            </a:solidFill>
+            <a:prstDash val="solid"/>
+          </a:ln>
+        </p:spPr>
+      </p:sp>
+      <p:sp>
+        <p:nvSpPr>
+          <p:cNvPr id="15" name="Shape 12"/>
+          <p:cNvSpPr/>
+          <p:nvPr/>
+        </p:nvSpPr>
+        <p:spPr>
+          <a:xfrm>
+            <a:off x="6748272" y="4197096"/>
+            <a:ext cx="237744" cy="237744"/>
+          </a:xfrm>
+          <a:prstGeom prst="ellipse">
+            <a:avLst/>
+          </a:prstGeom>
+          <a:solidFill>
+            <a:srgbClr val="A06A1B"/>
+          </a:solidFill>
+          <a:ln w="12700">
+            <a:solidFill>
+              <a:srgbClr val="A06A1B"/>
+            </a:solidFill>
+            <a:prstDash val="solid"/>
+          </a:ln>
+        </p:spPr>
+      </p:sp>
+      <p:sp>
+        <p:nvSpPr>
+          <p:cNvPr id="16" name="Text 13"/>
+          <p:cNvSpPr txBox="1"/>
+          <p:nvPr/>
+        </p:nvSpPr>
+        <p:spPr>
+          <a:xfrm>
+            <a:off x="7086600" y="4151376"/>
+            <a:ext cx="4389120" cy="292608"/>
+          </a:xfrm>
+          <a:prstGeom prst="rect">
+            <a:avLst/>
+          </a:prstGeom>
+          <a:noFill/>
+          <a:ln/>
+        </p:spPr>
+        <p:txBody>
+          <a:bodyPr wrap="square" lIns="0" tIns="0" rIns="0" bIns="0" rtlCol="0" anchor="ctr"/>
+          <a:lstStyle/>
+          <a:p>
+            <a:pPr indent="0" marL="0">
+              <a:buNone/>
+            </a:pPr>
+            <a:r>
+              <a:rPr lang="en-US" sz="1250" b="1" dirty="0">
                 <a:solidFill>
                   <a:srgbClr val="222B22"/>
                 </a:solidFill>
@@ -8898,20 +9202,129 @@
                 <a:ea typeface="Calibri" pitchFamily="34" charset="-122"/>
                 <a:cs typeface="Calibri" pitchFamily="34" charset="-120"/>
               </a:rPr>
-              <a:t>A13の保安林ポリゴンは2002年度整備で、国交省も精度を保証していない。</a:t>
+              <a:t>地目未確認が33筆・約4.59ha</a:t>
             </a:r>
-            <a:endParaRPr lang="en-US" sz="1050" dirty="0"/>
-          </a:p>
-          <a:p>
-            <a:pPr marL="342900" indent="-342900">
-              <a:spcAft>
-                <a:spcPts val="900"/>
-              </a:spcAft>
-              <a:buSzPct val="100000"/>
-              <a:buChar char="•"/>
+            <a:endParaRPr lang="en-US" sz="1250" dirty="0"/>
+          </a:p>
+        </p:txBody>
+      </p:sp>
+      <p:sp>
+        <p:nvSpPr>
+          <p:cNvPr id="17" name="Text 14"/>
+          <p:cNvSpPr txBox="1"/>
+          <p:nvPr/>
+        </p:nvSpPr>
+        <p:spPr>
+          <a:xfrm>
+            <a:off x="7086600" y="4443984"/>
+            <a:ext cx="4343400" cy="457200"/>
+          </a:xfrm>
+          <a:prstGeom prst="rect">
+            <a:avLst/>
+          </a:prstGeom>
+          <a:noFill/>
+          <a:ln/>
+        </p:spPr>
+        <p:txBody>
+          <a:bodyPr wrap="square" lIns="0" tIns="0" rIns="0" bIns="0" rtlCol="0" anchor="t"/>
+          <a:lstStyle/>
+          <a:p>
+            <a:pPr indent="0" marL="0">
+              <a:buNone/>
             </a:pPr>
             <a:r>
-              <a:rPr lang="en-US" sz="1050" dirty="0">
+              <a:rPr lang="en-US" sz="1000" dirty="0">
+                <a:solidFill>
+                  <a:srgbClr val="6B7A66"/>
+                </a:solidFill>
+                <a:latin typeface="Calibri" pitchFamily="34" charset="0"/>
+                <a:ea typeface="Calibri" pitchFamily="34" charset="-122"/>
+                <a:cs typeface="Calibri" pitchFamily="34" charset="-120"/>
+              </a:rPr>
+              <a:t>南側の大きな1番台ブロックが丸ごと未確認。確定済みの保安林より広く、ここに保安林が含まれると案件成立性が大きく変わる。</a:t>
+            </a:r>
+            <a:endParaRPr lang="en-US" sz="1000" dirty="0"/>
+          </a:p>
+        </p:txBody>
+      </p:sp>
+      <p:sp>
+        <p:nvSpPr>
+          <p:cNvPr id="18" name="Shape 15"/>
+          <p:cNvSpPr/>
+          <p:nvPr/>
+        </p:nvSpPr>
+        <p:spPr>
+          <a:xfrm>
+            <a:off x="6537960" y="5084064"/>
+            <a:ext cx="5074920" cy="914400"/>
+          </a:xfrm>
+          <a:prstGeom prst="roundRect">
+            <a:avLst>
+              <a:gd name="adj" fmla="val 6000"/>
+            </a:avLst>
+          </a:prstGeom>
+          <a:solidFill>
+            <a:srgbClr val="F7F9F4"/>
+          </a:solidFill>
+          <a:ln w="12700">
+            <a:solidFill>
+              <a:srgbClr val="D3DEC7"/>
+            </a:solidFill>
+            <a:prstDash val="solid"/>
+          </a:ln>
+        </p:spPr>
+      </p:sp>
+      <p:sp>
+        <p:nvSpPr>
+          <p:cNvPr id="19" name="Shape 16"/>
+          <p:cNvSpPr/>
+          <p:nvPr/>
+        </p:nvSpPr>
+        <p:spPr>
+          <a:xfrm>
+            <a:off x="6748272" y="5257800"/>
+            <a:ext cx="237744" cy="237744"/>
+          </a:xfrm>
+          <a:prstGeom prst="ellipse">
+            <a:avLst/>
+          </a:prstGeom>
+          <a:solidFill>
+            <a:srgbClr val="2C5F2D"/>
+          </a:solidFill>
+          <a:ln w="12700">
+            <a:solidFill>
+              <a:srgbClr val="2C5F2D"/>
+            </a:solidFill>
+            <a:prstDash val="solid"/>
+          </a:ln>
+        </p:spPr>
+      </p:sp>
+      <p:sp>
+        <p:nvSpPr>
+          <p:cNvPr id="20" name="Text 17"/>
+          <p:cNvSpPr txBox="1"/>
+          <p:nvPr/>
+        </p:nvSpPr>
+        <p:spPr>
+          <a:xfrm>
+            <a:off x="7086600" y="5212080"/>
+            <a:ext cx="4389120" cy="292608"/>
+          </a:xfrm>
+          <a:prstGeom prst="rect">
+            <a:avLst/>
+          </a:prstGeom>
+          <a:noFill/>
+          <a:ln/>
+        </p:spPr>
+        <p:txBody>
+          <a:bodyPr wrap="square" lIns="0" tIns="0" rIns="0" bIns="0" rtlCol="0" anchor="ctr"/>
+          <a:lstStyle/>
+          <a:p>
+            <a:pPr indent="0" marL="0">
+              <a:buNone/>
+            </a:pPr>
+            <a:r>
+              <a:rPr lang="en-US" sz="1250" b="1" dirty="0">
                 <a:solidFill>
                   <a:srgbClr val="222B22"/>
                 </a:solidFill>
@@ -8919,15 +9332,54 @@
                 <a:ea typeface="Calibri" pitchFamily="34" charset="-122"/>
                 <a:cs typeface="Calibri" pitchFamily="34" charset="-120"/>
               </a:rPr>
-              <a:t>マップあいちの森林情報マップに保安林レイヤは無く、Webでは確定できない。</a:t>
+              <a:t>公図の精度は実用水準</a:t>
             </a:r>
-            <a:endParaRPr lang="en-US" sz="1050" dirty="0"/>
+            <a:endParaRPr lang="en-US" sz="1250" dirty="0"/>
           </a:p>
         </p:txBody>
       </p:sp>
       <p:sp>
         <p:nvSpPr>
-          <p:cNvPr id="9" name="Text 5"/>
+          <p:cNvPr id="21" name="Text 18"/>
+          <p:cNvSpPr txBox="1"/>
+          <p:nvPr/>
+        </p:nvSpPr>
+        <p:spPr>
+          <a:xfrm>
+            <a:off x="7086600" y="5504688"/>
+            <a:ext cx="4343400" cy="457200"/>
+          </a:xfrm>
+          <a:prstGeom prst="rect">
+            <a:avLst/>
+          </a:prstGeom>
+          <a:noFill/>
+          <a:ln/>
+        </p:spPr>
+        <p:txBody>
+          <a:bodyPr wrap="square" lIns="0" tIns="0" rIns="0" bIns="0" rtlCol="0" anchor="t"/>
+          <a:lstStyle/>
+          <a:p>
+            <a:pPr indent="0" marL="0">
+              <a:buNone/>
+            </a:pPr>
+            <a:r>
+              <a:rPr lang="en-US" sz="1000" dirty="0">
+                <a:solidFill>
+                  <a:srgbClr val="6B7A66"/>
+                </a:solidFill>
+                <a:latin typeface="Calibri" pitchFamily="34" charset="0"/>
+                <a:ea typeface="Calibri" pitchFamily="34" charset="-122"/>
+                <a:cs typeface="Calibri" pitchFamily="34" charset="-120"/>
+              </a:rPr>
+              <a:t>主要筆の公図面積は求積図の実測値と概ね一致（22番8：公図10,620㎡／実測11,558㎡）。レイアウト検討の下図として使える。</a:t>
+            </a:r>
+            <a:endParaRPr lang="en-US" sz="1000" dirty="0"/>
+          </a:p>
+        </p:txBody>
+      </p:sp>
+      <p:sp>
+        <p:nvSpPr>
+          <p:cNvPr id="22" name="Text 19"/>
           <p:cNvSpPr txBox="1"/>
           <p:nvPr/>
         </p:nvSpPr>
@@ -8958,7 +9410,7 @@
                 <a:ea typeface="Calibri" pitchFamily="34" charset="-122"/>
                 <a:cs typeface="Calibri" pitchFamily="34" charset="-120"/>
               </a:rPr>
-              <a:t>背景地図：国土地理院 淡色地図　／　ポリゴン：国土数値情報 森林地域 A13-15（愛知県）</a:t>
+              <a:t>出典：法務省 登記所備付地図データ（G空間情報センター, 2026年2月）。任意座標系のため実際の緯度経度には配置できない。</a:t>
             </a:r>
             <a:endParaRPr lang="en-US" sz="950" dirty="0"/>
           </a:p>
@@ -9029,7 +9481,7 @@
                 <a:ea typeface="Cambria" pitchFamily="34" charset="-122"/>
                 <a:cs typeface="Cambria" pitchFamily="34" charset="-120"/>
               </a:rPr>
-              <a:t>かかる規制と手続</a:t>
+              <a:t>位置関係と公開データの限界</a:t>
             </a:r>
             <a:endParaRPr lang="en-US" sz="3200" dirty="0"/>
           </a:p>
@@ -9068,34 +9520,82 @@
                 <a:ea typeface="Calibri" pitchFamily="34" charset="-122"/>
                 <a:cs typeface="Calibri" pitchFamily="34" charset="-120"/>
               </a:rPr>
-              <a:t>保安林・林地開発許可・伐採届の3層。上ほど重い</a:t>
+              <a:t>国土数値情報の保安林ポリゴンは対象座標を含まないが、登記簿の実態とは一致しない</a:t>
             </a:r>
             <a:endParaRPr lang="en-US" sz="1300" dirty="0"/>
           </a:p>
         </p:txBody>
       </p:sp>
-      <p:sp>
-        <p:nvSpPr>
-          <p:cNvPr id="4" name="Shape 2"/>
+      <p:pic>
+        <p:nvPicPr>
+          <p:cNvPr id="4" name="Image 0" descr="map_zoom.png">    </p:cNvPr>
+          <p:cNvPicPr>
+            <a:picLocks noChangeAspect="1"/>
+          </p:cNvPicPr>
+          <p:nvPr/>
+        </p:nvPicPr>
+        <p:blipFill>
+          <a:blip r:embed="rId1"/>
+          <a:stretch>
+            <a:fillRect/>
+          </a:stretch>
+        </p:blipFill>
+        <p:spPr>
+          <a:xfrm>
+            <a:off x="548640" y="1463040"/>
+            <a:ext cx="4160520" cy="4160520"/>
+          </a:xfrm>
+          <a:prstGeom prst="rect">
+            <a:avLst/>
+          </a:prstGeom>
+        </p:spPr>
+      </p:pic>
+      <p:pic>
+        <p:nvPicPr>
+          <p:cNvPr id="5" name="Image 1" descr="map_wide.png">    </p:cNvPr>
+          <p:cNvPicPr>
+            <a:picLocks noChangeAspect="1"/>
+          </p:cNvPicPr>
+          <p:nvPr/>
+        </p:nvPicPr>
+        <p:blipFill>
+          <a:blip r:embed="rId2"/>
+          <a:stretch>
+            <a:fillRect/>
+          </a:stretch>
+        </p:blipFill>
+        <p:spPr>
+          <a:xfrm>
+            <a:off x="4892040" y="1463040"/>
+            <a:ext cx="4160520" cy="4160520"/>
+          </a:xfrm>
+          <a:prstGeom prst="rect">
+            <a:avLst/>
+          </a:prstGeom>
+        </p:spPr>
+      </p:pic>
+      <p:sp>
+        <p:nvSpPr>
+          <p:cNvPr id="6" name="Shape 2"/>
           <p:cNvSpPr/>
           <p:nvPr/>
         </p:nvSpPr>
         <p:spPr>
           <a:xfrm>
-            <a:off x="548640" y="1536192"/>
-            <a:ext cx="3520440" cy="4206240"/>
+            <a:off x="9281160" y="1463040"/>
+            <a:ext cx="2331720" cy="4160520"/>
           </a:xfrm>
           <a:prstGeom prst="roundRect">
             <a:avLst>
-              <a:gd name="adj" fmla="val 1558"/>
+              <a:gd name="adj" fmla="val 2353"/>
             </a:avLst>
           </a:prstGeom>
           <a:solidFill>
-            <a:srgbClr val="FBEEEC"/>
+            <a:srgbClr val="EDF2E6"/>
           </a:solidFill>
-          <a:ln w="15240">
+          <a:ln w="12700">
             <a:solidFill>
-              <a:srgbClr val="B02A1F"/>
+              <a:srgbClr val="D3DEC7"/>
             </a:solidFill>
             <a:prstDash val="solid"/>
           </a:ln>
@@ -9103,78 +9603,14 @@
       </p:sp>
       <p:sp>
         <p:nvSpPr>
-          <p:cNvPr id="5" name="Shape 3"/>
-          <p:cNvSpPr/>
-          <p:nvPr/>
-        </p:nvSpPr>
-        <p:spPr>
-          <a:xfrm>
-            <a:off x="804672" y="1783080"/>
-            <a:ext cx="402336" cy="402336"/>
-          </a:xfrm>
-          <a:prstGeom prst="ellipse">
-            <a:avLst/>
-          </a:prstGeom>
-          <a:solidFill>
-            <a:srgbClr val="B02A1F"/>
-          </a:solidFill>
-          <a:ln w="12700">
-            <a:solidFill>
-              <a:srgbClr val="B02A1F"/>
-            </a:solidFill>
-            <a:prstDash val="solid"/>
-          </a:ln>
-        </p:spPr>
-      </p:sp>
-      <p:sp>
-        <p:nvSpPr>
-          <p:cNvPr id="6" name="Text 4"/>
+          <p:cNvPr id="7" name="Text 3"/>
           <p:cNvSpPr txBox="1"/>
           <p:nvPr/>
         </p:nvSpPr>
         <p:spPr>
           <a:xfrm>
-            <a:off x="804672" y="1819656"/>
-            <a:ext cx="402336" cy="329184"/>
-          </a:xfrm>
-          <a:prstGeom prst="rect">
-            <a:avLst/>
-          </a:prstGeom>
-          <a:noFill/>
-          <a:ln/>
-        </p:spPr>
-        <p:txBody>
-          <a:bodyPr wrap="square" lIns="0" tIns="0" rIns="0" bIns="0" rtlCol="0" anchor="ctr"/>
-          <a:lstStyle/>
-          <a:p>
-            <a:pPr algn="ctr" indent="0" marL="0">
-              <a:buNone/>
-            </a:pPr>
-            <a:r>
-              <a:rPr lang="en-US" sz="1500" b="1" dirty="0">
-                <a:solidFill>
-                  <a:srgbClr val="FFFFFF"/>
-                </a:solidFill>
-                <a:latin typeface="Calibri" pitchFamily="34" charset="0"/>
-                <a:ea typeface="Calibri" pitchFamily="34" charset="-122"/>
-                <a:cs typeface="Calibri" pitchFamily="34" charset="-120"/>
-              </a:rPr>
-              <a:t>1</a:t>
-            </a:r>
-            <a:endParaRPr lang="en-US" sz="1500" dirty="0"/>
-          </a:p>
-        </p:txBody>
-      </p:sp>
-      <p:sp>
-        <p:nvSpPr>
-          <p:cNvPr id="7" name="Text 5"/>
-          <p:cNvSpPr txBox="1"/>
-          <p:nvPr/>
-        </p:nvSpPr>
-        <p:spPr>
-          <a:xfrm>
-            <a:off x="1325880" y="1773936"/>
-            <a:ext cx="2606040" cy="457200"/>
+            <a:off x="9509760" y="1645920"/>
+            <a:ext cx="1920240" cy="274320"/>
           </a:xfrm>
           <a:prstGeom prst="rect">
             <a:avLst/>
@@ -9190,69 +9626,30 @@
               <a:buNone/>
             </a:pPr>
             <a:r>
-              <a:rPr lang="en-US" sz="1600" b="1" dirty="0">
+              <a:rPr lang="en-US" sz="1400" b="1" dirty="0">
                 <a:solidFill>
-                  <a:srgbClr val="B02A1F"/>
+                  <a:srgbClr val="2C5F2D"/>
                 </a:solidFill>
                 <a:latin typeface="Cambria" pitchFamily="34" charset="0"/>
                 <a:ea typeface="Cambria" pitchFamily="34" charset="-122"/>
                 <a:cs typeface="Cambria" pitchFamily="34" charset="-120"/>
               </a:rPr>
-              <a:t>保安林</a:t>
+              <a:t>読み取りかた</a:t>
             </a:r>
-            <a:endParaRPr lang="en-US" sz="1600" dirty="0"/>
+            <a:endParaRPr lang="en-US" sz="1400" dirty="0"/>
           </a:p>
         </p:txBody>
       </p:sp>
       <p:sp>
         <p:nvSpPr>
-          <p:cNvPr id="8" name="Text 6"/>
+          <p:cNvPr id="8" name="Text 4"/>
           <p:cNvSpPr txBox="1"/>
           <p:nvPr/>
         </p:nvSpPr>
         <p:spPr>
           <a:xfrm>
-            <a:off x="804672" y="2304288"/>
-            <a:ext cx="3017520" cy="365760"/>
-          </a:xfrm>
-          <a:prstGeom prst="rect">
-            <a:avLst/>
-          </a:prstGeom>
-          <a:noFill/>
-          <a:ln/>
-        </p:spPr>
-        <p:txBody>
-          <a:bodyPr wrap="square" lIns="0" tIns="0" rIns="0" bIns="0" rtlCol="0" anchor="t"/>
-          <a:lstStyle/>
-          <a:p>
-            <a:pPr indent="0" marL="0">
-              <a:buNone/>
-            </a:pPr>
-            <a:r>
-              <a:rPr lang="en-US" sz="1050" dirty="0">
-                <a:solidFill>
-                  <a:srgbClr val="6B7A66"/>
-                </a:solidFill>
-                <a:latin typeface="Calibri" pitchFamily="34" charset="0"/>
-                <a:ea typeface="Calibri" pitchFamily="34" charset="-122"/>
-                <a:cs typeface="Calibri" pitchFamily="34" charset="-120"/>
-              </a:rPr>
-              <a:t>森林法 第25条・第34条</a:t>
-            </a:r>
-            <a:endParaRPr lang="en-US" sz="1050" dirty="0"/>
-          </a:p>
-        </p:txBody>
-      </p:sp>
-      <p:sp>
-        <p:nvSpPr>
-          <p:cNvPr id="9" name="Text 7"/>
-          <p:cNvSpPr txBox="1"/>
-          <p:nvPr/>
-        </p:nvSpPr>
-        <p:spPr>
-          <a:xfrm>
-            <a:off x="804672" y="2697480"/>
-            <a:ext cx="3017520" cy="2834640"/>
+            <a:off x="9509760" y="2011680"/>
+            <a:ext cx="1920240" cy="3474720"/>
           </a:xfrm>
           <a:prstGeom prst="rect">
             <a:avLst/>
@@ -9272,7 +9669,7 @@
               <a:buChar char="•"/>
             </a:pPr>
             <a:r>
-              <a:rPr lang="en-US" sz="1100" dirty="0">
+              <a:rPr lang="en-US" sz="1050" dirty="0">
                 <a:solidFill>
                   <a:srgbClr val="222B22"/>
                 </a:solidFill>
@@ -9280,9 +9677,9 @@
                 <a:ea typeface="Calibri" pitchFamily="34" charset="-122"/>
                 <a:cs typeface="Calibri" pitchFamily="34" charset="-120"/>
               </a:rPr>
-              <a:t>指定区域内の立木伐採・土地の形質変更は県知事の許可が必要。</a:t>
+              <a:t>公開データ（A13）上、対象座標から保安林境界まで約37m。</a:t>
             </a:r>
-            <a:endParaRPr lang="en-US" sz="1100" dirty="0"/>
+            <a:endParaRPr lang="en-US" sz="1050" dirty="0"/>
           </a:p>
           <a:p>
             <a:pPr marL="342900" indent="-342900">
@@ -9293,7 +9690,7 @@
               <a:buChar char="•"/>
             </a:pPr>
             <a:r>
-              <a:rPr lang="en-US" sz="1100" dirty="0">
+              <a:rPr lang="en-US" sz="1050" dirty="0">
                 <a:solidFill>
                   <a:srgbClr val="222B22"/>
                 </a:solidFill>
@@ -9301,9 +9698,9 @@
                 <a:ea typeface="Calibri" pitchFamily="34" charset="-122"/>
                 <a:cs typeface="Calibri" pitchFamily="34" charset="-120"/>
               </a:rPr>
-              <a:t>蓄電所用地としては原則不適。</a:t>
+              <a:t>しかし登記簿では対象地の15筆が地目「保安林」。</a:t>
             </a:r>
-            <a:endParaRPr lang="en-US" sz="1100" dirty="0"/>
+            <a:endParaRPr lang="en-US" sz="1050" dirty="0"/>
           </a:p>
           <a:p>
             <a:pPr marL="342900" indent="-342900">
@@ -9314,7 +9711,7 @@
               <a:buChar char="•"/>
             </a:pPr>
             <a:r>
-              <a:rPr lang="en-US" sz="1100" dirty="0">
+              <a:rPr lang="en-US" sz="1050" dirty="0">
                 <a:solidFill>
                   <a:srgbClr val="222B22"/>
                 </a:solidFill>
@@ -9322,9 +9719,9 @@
                 <a:ea typeface="Calibri" pitchFamily="34" charset="-122"/>
                 <a:cs typeface="Calibri" pitchFamily="34" charset="-120"/>
               </a:rPr>
-              <a:t>解除は「代替施設がない」等の要件を満たす必要があり、実務上きわめて困難。</a:t>
+              <a:t>A13の保安林ポリゴンは2002年度整備で、国交省も精度を保証していない。</a:t>
             </a:r>
-            <a:endParaRPr lang="en-US" sz="1100" dirty="0"/>
+            <a:endParaRPr lang="en-US" sz="1050" dirty="0"/>
           </a:p>
           <a:p>
             <a:pPr marL="342900" indent="-342900">
@@ -9335,7 +9732,7 @@
               <a:buChar char="•"/>
             </a:pPr>
             <a:r>
-              <a:rPr lang="en-US" sz="1100" dirty="0">
+              <a:rPr lang="en-US" sz="1050" dirty="0">
                 <a:solidFill>
                   <a:srgbClr val="222B22"/>
                 </a:solidFill>
@@ -9343,176 +9740,7 @@
                 <a:ea typeface="Calibri" pitchFamily="34" charset="-122"/>
                 <a:cs typeface="Calibri" pitchFamily="34" charset="-120"/>
               </a:rPr>
-              <a:t>許可権者：愛知県知事</a:t>
-            </a:r>
-            <a:endParaRPr lang="en-US" sz="1100" dirty="0"/>
-          </a:p>
-        </p:txBody>
-      </p:sp>
-      <p:sp>
-        <p:nvSpPr>
-          <p:cNvPr id="10" name="Shape 8"/>
-          <p:cNvSpPr/>
-          <p:nvPr/>
-        </p:nvSpPr>
-        <p:spPr>
-          <a:xfrm>
-            <a:off x="4315968" y="1536192"/>
-            <a:ext cx="3520440" cy="4206240"/>
-          </a:xfrm>
-          <a:prstGeom prst="roundRect">
-            <a:avLst>
-              <a:gd name="adj" fmla="val 1558"/>
-            </a:avLst>
-          </a:prstGeom>
-          <a:solidFill>
-            <a:srgbClr val="FCF3E4"/>
-          </a:solidFill>
-          <a:ln w="15240">
-            <a:solidFill>
-              <a:srgbClr val="A06A1B"/>
-            </a:solidFill>
-            <a:prstDash val="solid"/>
-          </a:ln>
-        </p:spPr>
-      </p:sp>
-      <p:sp>
-        <p:nvSpPr>
-          <p:cNvPr id="11" name="Shape 9"/>
-          <p:cNvSpPr/>
-          <p:nvPr/>
-        </p:nvSpPr>
-        <p:spPr>
-          <a:xfrm>
-            <a:off x="4572000" y="1783080"/>
-            <a:ext cx="402336" cy="402336"/>
-          </a:xfrm>
-          <a:prstGeom prst="ellipse">
-            <a:avLst/>
-          </a:prstGeom>
-          <a:solidFill>
-            <a:srgbClr val="A06A1B"/>
-          </a:solidFill>
-          <a:ln w="12700">
-            <a:solidFill>
-              <a:srgbClr val="A06A1B"/>
-            </a:solidFill>
-            <a:prstDash val="solid"/>
-          </a:ln>
-        </p:spPr>
-      </p:sp>
-      <p:sp>
-        <p:nvSpPr>
-          <p:cNvPr id="12" name="Text 10"/>
-          <p:cNvSpPr txBox="1"/>
-          <p:nvPr/>
-        </p:nvSpPr>
-        <p:spPr>
-          <a:xfrm>
-            <a:off x="4572000" y="1819656"/>
-            <a:ext cx="402336" cy="329184"/>
-          </a:xfrm>
-          <a:prstGeom prst="rect">
-            <a:avLst/>
-          </a:prstGeom>
-          <a:noFill/>
-          <a:ln/>
-        </p:spPr>
-        <p:txBody>
-          <a:bodyPr wrap="square" lIns="0" tIns="0" rIns="0" bIns="0" rtlCol="0" anchor="ctr"/>
-          <a:lstStyle/>
-          <a:p>
-            <a:pPr algn="ctr" indent="0" marL="0">
-              <a:buNone/>
-            </a:pPr>
-            <a:r>
-              <a:rPr lang="en-US" sz="1500" b="1" dirty="0">
-                <a:solidFill>
-                  <a:srgbClr val="FFFFFF"/>
-                </a:solidFill>
-                <a:latin typeface="Calibri" pitchFamily="34" charset="0"/>
-                <a:ea typeface="Calibri" pitchFamily="34" charset="-122"/>
-                <a:cs typeface="Calibri" pitchFamily="34" charset="-120"/>
-              </a:rPr>
-              <a:t>2</a:t>
-            </a:r>
-            <a:endParaRPr lang="en-US" sz="1500" dirty="0"/>
-          </a:p>
-        </p:txBody>
-      </p:sp>
-      <p:sp>
-        <p:nvSpPr>
-          <p:cNvPr id="13" name="Text 11"/>
-          <p:cNvSpPr txBox="1"/>
-          <p:nvPr/>
-        </p:nvSpPr>
-        <p:spPr>
-          <a:xfrm>
-            <a:off x="5093208" y="1773936"/>
-            <a:ext cx="2606040" cy="457200"/>
-          </a:xfrm>
-          <a:prstGeom prst="rect">
-            <a:avLst/>
-          </a:prstGeom>
-          <a:noFill/>
-          <a:ln/>
-        </p:spPr>
-        <p:txBody>
-          <a:bodyPr wrap="square" lIns="0" tIns="0" rIns="0" bIns="0" rtlCol="0" anchor="ctr"/>
-          <a:lstStyle/>
-          <a:p>
-            <a:pPr indent="0" marL="0">
-              <a:buNone/>
-            </a:pPr>
-            <a:r>
-              <a:rPr lang="en-US" sz="1600" b="1" dirty="0">
-                <a:solidFill>
-                  <a:srgbClr val="A06A1B"/>
-                </a:solidFill>
-                <a:latin typeface="Cambria" pitchFamily="34" charset="0"/>
-                <a:ea typeface="Cambria" pitchFamily="34" charset="-122"/>
-                <a:cs typeface="Cambria" pitchFamily="34" charset="-120"/>
-              </a:rPr>
-              <a:t>林地開発許可</a:t>
-            </a:r>
-            <a:endParaRPr lang="en-US" sz="1600" dirty="0"/>
-          </a:p>
-        </p:txBody>
-      </p:sp>
-      <p:sp>
-        <p:nvSpPr>
-          <p:cNvPr id="14" name="Text 12"/>
-          <p:cNvSpPr txBox="1"/>
-          <p:nvPr/>
-        </p:nvSpPr>
-        <p:spPr>
-          <a:xfrm>
-            <a:off x="4572000" y="2304288"/>
-            <a:ext cx="3017520" cy="365760"/>
-          </a:xfrm>
-          <a:prstGeom prst="rect">
-            <a:avLst/>
-          </a:prstGeom>
-          <a:noFill/>
-          <a:ln/>
-        </p:spPr>
-        <p:txBody>
-          <a:bodyPr wrap="square" lIns="0" tIns="0" rIns="0" bIns="0" rtlCol="0" anchor="t"/>
-          <a:lstStyle/>
-          <a:p>
-            <a:pPr indent="0" marL="0">
-              <a:buNone/>
-            </a:pPr>
-            <a:r>
-              <a:rPr lang="en-US" sz="1050" dirty="0">
-                <a:solidFill>
-                  <a:srgbClr val="6B7A66"/>
-                </a:solidFill>
-                <a:latin typeface="Calibri" pitchFamily="34" charset="0"/>
-                <a:ea typeface="Calibri" pitchFamily="34" charset="-122"/>
-                <a:cs typeface="Calibri" pitchFamily="34" charset="-120"/>
-              </a:rPr>
-              <a:t>森林法 第10条の2</a:t>
+              <a:t>マップあいちの森林情報マップに保安林レイヤは無く、Webでは確定できない。</a:t>
             </a:r>
             <a:endParaRPr lang="en-US" sz="1050" dirty="0"/>
           </a:p>
@@ -9520,367 +9748,7 @@
       </p:sp>
       <p:sp>
         <p:nvSpPr>
-          <p:cNvPr id="15" name="Text 13"/>
-          <p:cNvSpPr txBox="1"/>
-          <p:nvPr/>
-        </p:nvSpPr>
-        <p:spPr>
-          <a:xfrm>
-            <a:off x="4572000" y="2697480"/>
-            <a:ext cx="3017520" cy="2834640"/>
-          </a:xfrm>
-          <a:prstGeom prst="rect">
-            <a:avLst/>
-          </a:prstGeom>
-          <a:noFill/>
-          <a:ln/>
-        </p:spPr>
-        <p:txBody>
-          <a:bodyPr wrap="square" lIns="0" tIns="0" rIns="0" bIns="0" rtlCol="0" anchor="t"/>
-          <a:lstStyle/>
-          <a:p>
-            <a:pPr marL="342900" indent="-342900">
-              <a:spcAft>
-                <a:spcPts val="900"/>
-              </a:spcAft>
-              <a:buSzPct val="100000"/>
-              <a:buChar char="•"/>
-            </a:pPr>
-            <a:r>
-              <a:rPr lang="en-US" sz="1100" dirty="0">
-                <a:solidFill>
-                  <a:srgbClr val="222B22"/>
-                </a:solidFill>
-                <a:latin typeface="Calibri" pitchFamily="34" charset="0"/>
-                <a:ea typeface="Calibri" pitchFamily="34" charset="-122"/>
-                <a:cs typeface="Calibri" pitchFamily="34" charset="-120"/>
-              </a:rPr>
-              <a:t>地域森林計画対象民有林で1ha超の開発に必要。</a:t>
-            </a:r>
-            <a:endParaRPr lang="en-US" sz="1100" dirty="0"/>
-          </a:p>
-          <a:p>
-            <a:pPr marL="342900" indent="-342900">
-              <a:spcAft>
-                <a:spcPts val="900"/>
-              </a:spcAft>
-              <a:buSzPct val="100000"/>
-              <a:buChar char="•"/>
-            </a:pPr>
-            <a:r>
-              <a:rPr lang="en-US" sz="1100" dirty="0">
-                <a:solidFill>
-                  <a:srgbClr val="222B22"/>
-                </a:solidFill>
-                <a:latin typeface="Calibri" pitchFamily="34" charset="0"/>
-                <a:ea typeface="Calibri" pitchFamily="34" charset="-122"/>
-                <a:cs typeface="Calibri" pitchFamily="34" charset="-120"/>
-              </a:rPr>
-              <a:t>検討面積 42,992.45㎡＝約4.3ha のため確実に対象。</a:t>
-            </a:r>
-            <a:endParaRPr lang="en-US" sz="1100" dirty="0"/>
-          </a:p>
-          <a:p>
-            <a:pPr marL="342900" indent="-342900">
-              <a:spcAft>
-                <a:spcPts val="900"/>
-              </a:spcAft>
-              <a:buSzPct val="100000"/>
-              <a:buChar char="•"/>
-            </a:pPr>
-            <a:r>
-              <a:rPr lang="en-US" sz="1100" dirty="0">
-                <a:solidFill>
-                  <a:srgbClr val="222B22"/>
-                </a:solidFill>
-                <a:latin typeface="Calibri" pitchFamily="34" charset="0"/>
-                <a:ea typeface="Calibri" pitchFamily="34" charset="-122"/>
-                <a:cs typeface="Calibri" pitchFamily="34" charset="-120"/>
-              </a:rPr>
-              <a:t>防災・環境の4要件審査。標準処理期間は数か月規模。</a:t>
-            </a:r>
-            <a:endParaRPr lang="en-US" sz="1100" dirty="0"/>
-          </a:p>
-          <a:p>
-            <a:pPr marL="342900" indent="-342900">
-              <a:spcAft>
-                <a:spcPts val="900"/>
-              </a:spcAft>
-              <a:buSzPct val="100000"/>
-              <a:buChar char="•"/>
-            </a:pPr>
-            <a:r>
-              <a:rPr lang="en-US" sz="1100" dirty="0">
-                <a:solidFill>
-                  <a:srgbClr val="222B22"/>
-                </a:solidFill>
-                <a:latin typeface="Calibri" pitchFamily="34" charset="0"/>
-                <a:ea typeface="Calibri" pitchFamily="34" charset="-122"/>
-                <a:cs typeface="Calibri" pitchFamily="34" charset="-120"/>
-              </a:rPr>
-              <a:t>許可権者：愛知県知事</a:t>
-            </a:r>
-            <a:endParaRPr lang="en-US" sz="1100" dirty="0"/>
-          </a:p>
-        </p:txBody>
-      </p:sp>
-      <p:sp>
-        <p:nvSpPr>
-          <p:cNvPr id="16" name="Shape 14"/>
-          <p:cNvSpPr/>
-          <p:nvPr/>
-        </p:nvSpPr>
-        <p:spPr>
-          <a:xfrm>
-            <a:off x="8083296" y="1536192"/>
-            <a:ext cx="3520440" cy="4206240"/>
-          </a:xfrm>
-          <a:prstGeom prst="roundRect">
-            <a:avLst>
-              <a:gd name="adj" fmla="val 1558"/>
-            </a:avLst>
-          </a:prstGeom>
-          <a:solidFill>
-            <a:srgbClr val="EDF2E6"/>
-          </a:solidFill>
-          <a:ln w="15240">
-            <a:solidFill>
-              <a:srgbClr val="2C5F2D"/>
-            </a:solidFill>
-            <a:prstDash val="solid"/>
-          </a:ln>
-        </p:spPr>
-      </p:sp>
-      <p:sp>
-        <p:nvSpPr>
-          <p:cNvPr id="17" name="Shape 15"/>
-          <p:cNvSpPr/>
-          <p:nvPr/>
-        </p:nvSpPr>
-        <p:spPr>
-          <a:xfrm>
-            <a:off x="8339328" y="1783080"/>
-            <a:ext cx="402336" cy="402336"/>
-          </a:xfrm>
-          <a:prstGeom prst="ellipse">
-            <a:avLst/>
-          </a:prstGeom>
-          <a:solidFill>
-            <a:srgbClr val="2C5F2D"/>
-          </a:solidFill>
-          <a:ln w="12700">
-            <a:solidFill>
-              <a:srgbClr val="2C5F2D"/>
-            </a:solidFill>
-            <a:prstDash val="solid"/>
-          </a:ln>
-        </p:spPr>
-      </p:sp>
-      <p:sp>
-        <p:nvSpPr>
-          <p:cNvPr id="18" name="Text 16"/>
-          <p:cNvSpPr txBox="1"/>
-          <p:nvPr/>
-        </p:nvSpPr>
-        <p:spPr>
-          <a:xfrm>
-            <a:off x="8339328" y="1819656"/>
-            <a:ext cx="402336" cy="329184"/>
-          </a:xfrm>
-          <a:prstGeom prst="rect">
-            <a:avLst/>
-          </a:prstGeom>
-          <a:noFill/>
-          <a:ln/>
-        </p:spPr>
-        <p:txBody>
-          <a:bodyPr wrap="square" lIns="0" tIns="0" rIns="0" bIns="0" rtlCol="0" anchor="ctr"/>
-          <a:lstStyle/>
-          <a:p>
-            <a:pPr algn="ctr" indent="0" marL="0">
-              <a:buNone/>
-            </a:pPr>
-            <a:r>
-              <a:rPr lang="en-US" sz="1500" b="1" dirty="0">
-                <a:solidFill>
-                  <a:srgbClr val="FFFFFF"/>
-                </a:solidFill>
-                <a:latin typeface="Calibri" pitchFamily="34" charset="0"/>
-                <a:ea typeface="Calibri" pitchFamily="34" charset="-122"/>
-                <a:cs typeface="Calibri" pitchFamily="34" charset="-120"/>
-              </a:rPr>
-              <a:t>3</a:t>
-            </a:r>
-            <a:endParaRPr lang="en-US" sz="1500" dirty="0"/>
-          </a:p>
-        </p:txBody>
-      </p:sp>
-      <p:sp>
-        <p:nvSpPr>
-          <p:cNvPr id="19" name="Text 17"/>
-          <p:cNvSpPr txBox="1"/>
-          <p:nvPr/>
-        </p:nvSpPr>
-        <p:spPr>
-          <a:xfrm>
-            <a:off x="8860536" y="1773936"/>
-            <a:ext cx="2606040" cy="457200"/>
-          </a:xfrm>
-          <a:prstGeom prst="rect">
-            <a:avLst/>
-          </a:prstGeom>
-          <a:noFill/>
-          <a:ln/>
-        </p:spPr>
-        <p:txBody>
-          <a:bodyPr wrap="square" lIns="0" tIns="0" rIns="0" bIns="0" rtlCol="0" anchor="ctr"/>
-          <a:lstStyle/>
-          <a:p>
-            <a:pPr indent="0" marL="0">
-              <a:buNone/>
-            </a:pPr>
-            <a:r>
-              <a:rPr lang="en-US" sz="1600" b="1" dirty="0">
-                <a:solidFill>
-                  <a:srgbClr val="2C5F2D"/>
-                </a:solidFill>
-                <a:latin typeface="Cambria" pitchFamily="34" charset="0"/>
-                <a:ea typeface="Cambria" pitchFamily="34" charset="-122"/>
-                <a:cs typeface="Cambria" pitchFamily="34" charset="-120"/>
-              </a:rPr>
-              <a:t>伐採届</a:t>
-            </a:r>
-            <a:endParaRPr lang="en-US" sz="1600" dirty="0"/>
-          </a:p>
-        </p:txBody>
-      </p:sp>
-      <p:sp>
-        <p:nvSpPr>
-          <p:cNvPr id="20" name="Text 18"/>
-          <p:cNvSpPr txBox="1"/>
-          <p:nvPr/>
-        </p:nvSpPr>
-        <p:spPr>
-          <a:xfrm>
-            <a:off x="8339328" y="2304288"/>
-            <a:ext cx="3017520" cy="365760"/>
-          </a:xfrm>
-          <a:prstGeom prst="rect">
-            <a:avLst/>
-          </a:prstGeom>
-          <a:noFill/>
-          <a:ln/>
-        </p:spPr>
-        <p:txBody>
-          <a:bodyPr wrap="square" lIns="0" tIns="0" rIns="0" bIns="0" rtlCol="0" anchor="t"/>
-          <a:lstStyle/>
-          <a:p>
-            <a:pPr indent="0" marL="0">
-              <a:buNone/>
-            </a:pPr>
-            <a:r>
-              <a:rPr lang="en-US" sz="1050" dirty="0">
-                <a:solidFill>
-                  <a:srgbClr val="6B7A66"/>
-                </a:solidFill>
-                <a:latin typeface="Calibri" pitchFamily="34" charset="0"/>
-                <a:ea typeface="Calibri" pitchFamily="34" charset="-122"/>
-                <a:cs typeface="Calibri" pitchFamily="34" charset="-120"/>
-              </a:rPr>
-              <a:t>森林法 第10条の8（伐採及び伐採後の造林の届出）</a:t>
-            </a:r>
-            <a:endParaRPr lang="en-US" sz="1050" dirty="0"/>
-          </a:p>
-        </p:txBody>
-      </p:sp>
-      <p:sp>
-        <p:nvSpPr>
-          <p:cNvPr id="21" name="Text 19"/>
-          <p:cNvSpPr txBox="1"/>
-          <p:nvPr/>
-        </p:nvSpPr>
-        <p:spPr>
-          <a:xfrm>
-            <a:off x="8339328" y="2697480"/>
-            <a:ext cx="3017520" cy="2834640"/>
-          </a:xfrm>
-          <a:prstGeom prst="rect">
-            <a:avLst/>
-          </a:prstGeom>
-          <a:noFill/>
-          <a:ln/>
-        </p:spPr>
-        <p:txBody>
-          <a:bodyPr wrap="square" lIns="0" tIns="0" rIns="0" bIns="0" rtlCol="0" anchor="t"/>
-          <a:lstStyle/>
-          <a:p>
-            <a:pPr marL="342900" indent="-342900">
-              <a:spcAft>
-                <a:spcPts val="900"/>
-              </a:spcAft>
-              <a:buSzPct val="100000"/>
-              <a:buChar char="•"/>
-            </a:pPr>
-            <a:r>
-              <a:rPr lang="en-US" sz="1100" dirty="0">
-                <a:solidFill>
-                  <a:srgbClr val="222B22"/>
-                </a:solidFill>
-                <a:latin typeface="Calibri" pitchFamily="34" charset="0"/>
-                <a:ea typeface="Calibri" pitchFamily="34" charset="-122"/>
-                <a:cs typeface="Calibri" pitchFamily="34" charset="-120"/>
-              </a:rPr>
-              <a:t>1ha以下の伐採でも市町村への事前届出が必要。</a:t>
-            </a:r>
-            <a:endParaRPr lang="en-US" sz="1100" dirty="0"/>
-          </a:p>
-          <a:p>
-            <a:pPr marL="342900" indent="-342900">
-              <a:spcAft>
-                <a:spcPts val="900"/>
-              </a:spcAft>
-              <a:buSzPct val="100000"/>
-              <a:buChar char="•"/>
-            </a:pPr>
-            <a:r>
-              <a:rPr lang="en-US" sz="1100" dirty="0">
-                <a:solidFill>
-                  <a:srgbClr val="222B22"/>
-                </a:solidFill>
-                <a:latin typeface="Calibri" pitchFamily="34" charset="0"/>
-                <a:ea typeface="Calibri" pitchFamily="34" charset="-122"/>
-                <a:cs typeface="Calibri" pitchFamily="34" charset="-120"/>
-              </a:rPr>
-              <a:t>伐採90〜30日前に提出。</a:t>
-            </a:r>
-            <a:endParaRPr lang="en-US" sz="1100" dirty="0"/>
-          </a:p>
-          <a:p>
-            <a:pPr marL="342900" indent="-342900">
-              <a:spcAft>
-                <a:spcPts val="900"/>
-              </a:spcAft>
-              <a:buSzPct val="100000"/>
-              <a:buChar char="•"/>
-            </a:pPr>
-            <a:r>
-              <a:rPr lang="en-US" sz="1100" dirty="0">
-                <a:solidFill>
-                  <a:srgbClr val="222B22"/>
-                </a:solidFill>
-                <a:latin typeface="Calibri" pitchFamily="34" charset="0"/>
-                <a:ea typeface="Calibri" pitchFamily="34" charset="-122"/>
-                <a:cs typeface="Calibri" pitchFamily="34" charset="-120"/>
-              </a:rPr>
-              <a:t>届出先：岡崎市 林務担当</a:t>
-            </a:r>
-            <a:endParaRPr lang="en-US" sz="1100" dirty="0"/>
-          </a:p>
-        </p:txBody>
-      </p:sp>
-      <p:sp>
-        <p:nvSpPr>
-          <p:cNvPr id="22" name="Text 20"/>
+          <p:cNvPr id="9" name="Text 5"/>
           <p:cNvSpPr txBox="1"/>
           <p:nvPr/>
         </p:nvSpPr>
@@ -9911,7 +9779,7 @@
                 <a:ea typeface="Calibri" pitchFamily="34" charset="-122"/>
                 <a:cs typeface="Calibri" pitchFamily="34" charset="-120"/>
               </a:rPr>
-              <a:t>太陽光は0.5ha超で林地開発許可の対象。蓄電所は「その他」区分で1ha超が基準。</a:t>
+              <a:t>背景地図：国土地理院 淡色地図　／　ポリゴン：国土数値情報 森林地域 A13-15（愛知県）</a:t>
             </a:r>
             <a:endParaRPr lang="en-US" sz="950" dirty="0"/>
           </a:p>
@@ -9982,7 +9850,7 @@
                 <a:ea typeface="Cambria" pitchFamily="34" charset="-122"/>
                 <a:cs typeface="Cambria" pitchFamily="34" charset="-120"/>
               </a:rPr>
-              <a:t>リスクと検討論点</a:t>
+              <a:t>かかる規制と手続</a:t>
             </a:r>
             <a:endParaRPr lang="en-US" sz="3200" dirty="0"/>
           </a:p>
@@ -10021,7 +9889,7 @@
                 <a:ea typeface="Calibri" pitchFamily="34" charset="-122"/>
                 <a:cs typeface="Calibri" pitchFamily="34" charset="-120"/>
               </a:rPr>
-              <a:t>保安林をどう扱うかで案件成立性が決まる</a:t>
+              <a:t>保安林・林地開発許可・伐採届の3層。上ほど重い</a:t>
             </a:r>
             <a:endParaRPr lang="en-US" sz="1300" dirty="0"/>
           </a:p>
@@ -10035,13 +9903,38 @@
         </p:nvSpPr>
         <p:spPr>
           <a:xfrm>
-            <a:off x="548640" y="1572768"/>
-            <a:ext cx="658368" cy="384048"/>
+            <a:off x="548640" y="1536192"/>
+            <a:ext cx="3520440" cy="4206240"/>
           </a:xfrm>
           <a:prstGeom prst="roundRect">
             <a:avLst>
-              <a:gd name="adj" fmla="val 14286"/>
+              <a:gd name="adj" fmla="val 1558"/>
             </a:avLst>
+          </a:prstGeom>
+          <a:solidFill>
+            <a:srgbClr val="FBEEEC"/>
+          </a:solidFill>
+          <a:ln w="15240">
+            <a:solidFill>
+              <a:srgbClr val="B02A1F"/>
+            </a:solidFill>
+            <a:prstDash val="solid"/>
+          </a:ln>
+        </p:spPr>
+      </p:sp>
+      <p:sp>
+        <p:nvSpPr>
+          <p:cNvPr id="5" name="Shape 3"/>
+          <p:cNvSpPr/>
+          <p:nvPr/>
+        </p:nvSpPr>
+        <p:spPr>
+          <a:xfrm>
+            <a:off x="804672" y="1783080"/>
+            <a:ext cx="402336" cy="402336"/>
+          </a:xfrm>
+          <a:prstGeom prst="ellipse">
+            <a:avLst/>
           </a:prstGeom>
           <a:solidFill>
             <a:srgbClr val="B02A1F"/>
@@ -10056,14 +9949,14 @@
       </p:sp>
       <p:sp>
         <p:nvSpPr>
-          <p:cNvPr id="5" name="Text 3"/>
+          <p:cNvPr id="6" name="Text 4"/>
           <p:cNvSpPr txBox="1"/>
           <p:nvPr/>
         </p:nvSpPr>
         <p:spPr>
           <a:xfrm>
-            <a:off x="548640" y="1618488"/>
-            <a:ext cx="658368" cy="292608"/>
+            <a:off x="804672" y="1819656"/>
+            <a:ext cx="402336" cy="329184"/>
           </a:xfrm>
           <a:prstGeom prst="rect">
             <a:avLst/>
@@ -10079,7 +9972,7 @@
               <a:buNone/>
             </a:pPr>
             <a:r>
-              <a:rPr lang="en-US" sz="1300" b="1" dirty="0">
+              <a:rPr lang="en-US" sz="1500" b="1" dirty="0">
                 <a:solidFill>
                   <a:srgbClr val="FFFFFF"/>
                 </a:solidFill>
@@ -10087,22 +9980,22 @@
                 <a:ea typeface="Calibri" pitchFamily="34" charset="-122"/>
                 <a:cs typeface="Calibri" pitchFamily="34" charset="-120"/>
               </a:rPr>
-              <a:t>高</a:t>
+              <a:t>1</a:t>
             </a:r>
-            <a:endParaRPr lang="en-US" sz="1300" dirty="0"/>
+            <a:endParaRPr lang="en-US" sz="1500" dirty="0"/>
           </a:p>
         </p:txBody>
       </p:sp>
       <p:sp>
         <p:nvSpPr>
-          <p:cNvPr id="6" name="Text 4"/>
+          <p:cNvPr id="7" name="Text 5"/>
           <p:cNvSpPr txBox="1"/>
           <p:nvPr/>
         </p:nvSpPr>
         <p:spPr>
           <a:xfrm>
-            <a:off x="1371600" y="1572768"/>
-            <a:ext cx="10241280" cy="310896"/>
+            <a:off x="1325880" y="1773936"/>
+            <a:ext cx="2606040" cy="457200"/>
           </a:xfrm>
           <a:prstGeom prst="rect">
             <a:avLst/>
@@ -10118,7 +10011,89 @@
               <a:buNone/>
             </a:pPr>
             <a:r>
-              <a:rPr lang="en-US" sz="1400" b="1" dirty="0">
+              <a:rPr lang="en-US" sz="1600" b="1" dirty="0">
+                <a:solidFill>
+                  <a:srgbClr val="B02A1F"/>
+                </a:solidFill>
+                <a:latin typeface="Cambria" pitchFamily="34" charset="0"/>
+                <a:ea typeface="Cambria" pitchFamily="34" charset="-122"/>
+                <a:cs typeface="Cambria" pitchFamily="34" charset="-120"/>
+              </a:rPr>
+              <a:t>保安林</a:t>
+            </a:r>
+            <a:endParaRPr lang="en-US" sz="1600" dirty="0"/>
+          </a:p>
+        </p:txBody>
+      </p:sp>
+      <p:sp>
+        <p:nvSpPr>
+          <p:cNvPr id="8" name="Text 6"/>
+          <p:cNvSpPr txBox="1"/>
+          <p:nvPr/>
+        </p:nvSpPr>
+        <p:spPr>
+          <a:xfrm>
+            <a:off x="804672" y="2304288"/>
+            <a:ext cx="3017520" cy="365760"/>
+          </a:xfrm>
+          <a:prstGeom prst="rect">
+            <a:avLst/>
+          </a:prstGeom>
+          <a:noFill/>
+          <a:ln/>
+        </p:spPr>
+        <p:txBody>
+          <a:bodyPr wrap="square" lIns="0" tIns="0" rIns="0" bIns="0" rtlCol="0" anchor="t"/>
+          <a:lstStyle/>
+          <a:p>
+            <a:pPr indent="0" marL="0">
+              <a:buNone/>
+            </a:pPr>
+            <a:r>
+              <a:rPr lang="en-US" sz="1050" dirty="0">
+                <a:solidFill>
+                  <a:srgbClr val="6B7A66"/>
+                </a:solidFill>
+                <a:latin typeface="Calibri" pitchFamily="34" charset="0"/>
+                <a:ea typeface="Calibri" pitchFamily="34" charset="-122"/>
+                <a:cs typeface="Calibri" pitchFamily="34" charset="-120"/>
+              </a:rPr>
+              <a:t>森林法 第25条・第34条</a:t>
+            </a:r>
+            <a:endParaRPr lang="en-US" sz="1050" dirty="0"/>
+          </a:p>
+        </p:txBody>
+      </p:sp>
+      <p:sp>
+        <p:nvSpPr>
+          <p:cNvPr id="9" name="Text 7"/>
+          <p:cNvSpPr txBox="1"/>
+          <p:nvPr/>
+        </p:nvSpPr>
+        <p:spPr>
+          <a:xfrm>
+            <a:off x="804672" y="2697480"/>
+            <a:ext cx="3017520" cy="2834640"/>
+          </a:xfrm>
+          <a:prstGeom prst="rect">
+            <a:avLst/>
+          </a:prstGeom>
+          <a:noFill/>
+          <a:ln/>
+        </p:spPr>
+        <p:txBody>
+          <a:bodyPr wrap="square" lIns="0" tIns="0" rIns="0" bIns="0" rtlCol="0" anchor="t"/>
+          <a:lstStyle/>
+          <a:p>
+            <a:pPr marL="342900" indent="-342900">
+              <a:spcAft>
+                <a:spcPts val="900"/>
+              </a:spcAft>
+              <a:buSzPct val="100000"/>
+              <a:buChar char="•"/>
+            </a:pPr>
+            <a:r>
+              <a:rPr lang="en-US" sz="1100" dirty="0">
                 <a:solidFill>
                   <a:srgbClr val="222B22"/>
                 </a:solidFill>
@@ -10126,143 +10101,20 @@
                 <a:ea typeface="Calibri" pitchFamily="34" charset="-122"/>
                 <a:cs typeface="Calibri" pitchFamily="34" charset="-120"/>
               </a:rPr>
-              <a:t>保安林区域が造成範囲に入る</a:t>
+              <a:t>指定区域内の立木伐採・土地の形質変更は県知事の許可が必要。</a:t>
             </a:r>
-            <a:endParaRPr lang="en-US" sz="1400" dirty="0"/>
-          </a:p>
-        </p:txBody>
-      </p:sp>
-      <p:sp>
-        <p:nvSpPr>
-          <p:cNvPr id="7" name="Text 5"/>
-          <p:cNvSpPr txBox="1"/>
-          <p:nvPr/>
-        </p:nvSpPr>
-        <p:spPr>
-          <a:xfrm>
-            <a:off x="1371600" y="1901952"/>
-            <a:ext cx="10241280" cy="457200"/>
-          </a:xfrm>
-          <a:prstGeom prst="rect">
-            <a:avLst/>
-          </a:prstGeom>
-          <a:noFill/>
-          <a:ln/>
-        </p:spPr>
-        <p:txBody>
-          <a:bodyPr wrap="square" lIns="0" tIns="0" rIns="0" bIns="0" rtlCol="0" anchor="ctr"/>
-          <a:lstStyle/>
-          <a:p>
-            <a:pPr indent="0" marL="0">
-              <a:buNone/>
+            <a:endParaRPr lang="en-US" sz="1100" dirty="0"/>
+          </a:p>
+          <a:p>
+            <a:pPr marL="342900" indent="-342900">
+              <a:spcAft>
+                <a:spcPts val="900"/>
+              </a:spcAft>
+              <a:buSzPct val="100000"/>
+              <a:buChar char="•"/>
             </a:pPr>
             <a:r>
-              <a:rPr lang="en-US" sz="1150" dirty="0">
-                <a:solidFill>
-                  <a:srgbClr val="6B7A66"/>
-                </a:solidFill>
-                <a:latin typeface="Calibri" pitchFamily="34" charset="0"/>
-                <a:ea typeface="Calibri" pitchFamily="34" charset="-122"/>
-                <a:cs typeface="Calibri" pitchFamily="34" charset="-120"/>
-              </a:rPr>
-              <a:t>15筆・登記地積で約1.82ha。造成レイアウト次第では案件不成立。</a:t>
-            </a:r>
-            <a:endParaRPr lang="en-US" sz="1150" dirty="0"/>
-          </a:p>
-        </p:txBody>
-      </p:sp>
-      <p:sp>
-        <p:nvSpPr>
-          <p:cNvPr id="8" name="Shape 6"/>
-          <p:cNvSpPr/>
-          <p:nvPr/>
-        </p:nvSpPr>
-        <p:spPr>
-          <a:xfrm>
-            <a:off x="548640" y="2468880"/>
-            <a:ext cx="658368" cy="384048"/>
-          </a:xfrm>
-          <a:prstGeom prst="roundRect">
-            <a:avLst>
-              <a:gd name="adj" fmla="val 14286"/>
-            </a:avLst>
-          </a:prstGeom>
-          <a:solidFill>
-            <a:srgbClr val="B02A1F"/>
-          </a:solidFill>
-          <a:ln w="12700">
-            <a:solidFill>
-              <a:srgbClr val="B02A1F"/>
-            </a:solidFill>
-            <a:prstDash val="solid"/>
-          </a:ln>
-        </p:spPr>
-      </p:sp>
-      <p:sp>
-        <p:nvSpPr>
-          <p:cNvPr id="9" name="Text 7"/>
-          <p:cNvSpPr txBox="1"/>
-          <p:nvPr/>
-        </p:nvSpPr>
-        <p:spPr>
-          <a:xfrm>
-            <a:off x="548640" y="2514600"/>
-            <a:ext cx="658368" cy="292608"/>
-          </a:xfrm>
-          <a:prstGeom prst="rect">
-            <a:avLst/>
-          </a:prstGeom>
-          <a:noFill/>
-          <a:ln/>
-        </p:spPr>
-        <p:txBody>
-          <a:bodyPr wrap="square" lIns="0" tIns="0" rIns="0" bIns="0" rtlCol="0" anchor="ctr"/>
-          <a:lstStyle/>
-          <a:p>
-            <a:pPr algn="ctr" indent="0" marL="0">
-              <a:buNone/>
-            </a:pPr>
-            <a:r>
-              <a:rPr lang="en-US" sz="1300" b="1" dirty="0">
-                <a:solidFill>
-                  <a:srgbClr val="FFFFFF"/>
-                </a:solidFill>
-                <a:latin typeface="Calibri" pitchFamily="34" charset="0"/>
-                <a:ea typeface="Calibri" pitchFamily="34" charset="-122"/>
-                <a:cs typeface="Calibri" pitchFamily="34" charset="-120"/>
-              </a:rPr>
-              <a:t>高</a:t>
-            </a:r>
-            <a:endParaRPr lang="en-US" sz="1300" dirty="0"/>
-          </a:p>
-        </p:txBody>
-      </p:sp>
-      <p:sp>
-        <p:nvSpPr>
-          <p:cNvPr id="10" name="Text 8"/>
-          <p:cNvSpPr txBox="1"/>
-          <p:nvPr/>
-        </p:nvSpPr>
-        <p:spPr>
-          <a:xfrm>
-            <a:off x="1371600" y="2468880"/>
-            <a:ext cx="10241280" cy="310896"/>
-          </a:xfrm>
-          <a:prstGeom prst="rect">
-            <a:avLst/>
-          </a:prstGeom>
-          <a:noFill/>
-          <a:ln/>
-        </p:spPr>
-        <p:txBody>
-          <a:bodyPr wrap="square" lIns="0" tIns="0" rIns="0" bIns="0" rtlCol="0" anchor="ctr"/>
-          <a:lstStyle/>
-          <a:p>
-            <a:pPr indent="0" marL="0">
-              <a:buNone/>
-            </a:pPr>
-            <a:r>
-              <a:rPr lang="en-US" sz="1400" b="1" dirty="0">
+              <a:rPr lang="en-US" sz="1100" dirty="0">
                 <a:solidFill>
                   <a:srgbClr val="222B22"/>
                 </a:solidFill>
@@ -10270,66 +10122,94 @@
                 <a:ea typeface="Calibri" pitchFamily="34" charset="-122"/>
                 <a:cs typeface="Calibri" pitchFamily="34" charset="-120"/>
               </a:rPr>
-              <a:t>未取得登記簿に追加の保安林がある可能性</a:t>
+              <a:t>蓄電所用地としては原則不適。</a:t>
             </a:r>
-            <a:endParaRPr lang="en-US" sz="1400" dirty="0"/>
-          </a:p>
-        </p:txBody>
-      </p:sp>
-      <p:sp>
-        <p:nvSpPr>
-          <p:cNvPr id="11" name="Text 9"/>
-          <p:cNvSpPr txBox="1"/>
-          <p:nvPr/>
-        </p:nvSpPr>
-        <p:spPr>
-          <a:xfrm>
-            <a:off x="1371600" y="2798064"/>
-            <a:ext cx="10241280" cy="457200"/>
-          </a:xfrm>
-          <a:prstGeom prst="rect">
-            <a:avLst/>
-          </a:prstGeom>
-          <a:noFill/>
-          <a:ln/>
-        </p:spPr>
-        <p:txBody>
-          <a:bodyPr wrap="square" lIns="0" tIns="0" rIns="0" bIns="0" rtlCol="0" anchor="ctr"/>
-          <a:lstStyle/>
-          <a:p>
-            <a:pPr indent="0" marL="0">
-              <a:buNone/>
+            <a:endParaRPr lang="en-US" sz="1100" dirty="0"/>
+          </a:p>
+          <a:p>
+            <a:pPr marL="342900" indent="-342900">
+              <a:spcAft>
+                <a:spcPts val="900"/>
+              </a:spcAft>
+              <a:buSzPct val="100000"/>
+              <a:buChar char="•"/>
             </a:pPr>
             <a:r>
-              <a:rPr lang="en-US" sz="1150" dirty="0">
+              <a:rPr lang="en-US" sz="1100" dirty="0">
                 <a:solidFill>
-                  <a:srgbClr val="6B7A66"/>
+                  <a:srgbClr val="222B22"/>
                 </a:solidFill>
                 <a:latin typeface="Calibri" pitchFamily="34" charset="0"/>
                 <a:ea typeface="Calibri" pitchFamily="34" charset="-122"/>
                 <a:cs typeface="Calibri" pitchFamily="34" charset="-120"/>
               </a:rPr>
-              <a:t>求積図の1番台など約30筆は地目未確認。全筆の地目確認が必須。</a:t>
+              <a:t>解除は「代替施設がない」等の要件を満たす必要があり、実務上きわめて困難。</a:t>
             </a:r>
-            <a:endParaRPr lang="en-US" sz="1150" dirty="0"/>
+            <a:endParaRPr lang="en-US" sz="1100" dirty="0"/>
+          </a:p>
+          <a:p>
+            <a:pPr marL="342900" indent="-342900">
+              <a:spcAft>
+                <a:spcPts val="900"/>
+              </a:spcAft>
+              <a:buSzPct val="100000"/>
+              <a:buChar char="•"/>
+            </a:pPr>
+            <a:r>
+              <a:rPr lang="en-US" sz="1100" dirty="0">
+                <a:solidFill>
+                  <a:srgbClr val="222B22"/>
+                </a:solidFill>
+                <a:latin typeface="Calibri" pitchFamily="34" charset="0"/>
+                <a:ea typeface="Calibri" pitchFamily="34" charset="-122"/>
+                <a:cs typeface="Calibri" pitchFamily="34" charset="-120"/>
+              </a:rPr>
+              <a:t>許可権者：愛知県知事</a:t>
+            </a:r>
+            <a:endParaRPr lang="en-US" sz="1100" dirty="0"/>
           </a:p>
         </p:txBody>
       </p:sp>
       <p:sp>
         <p:nvSpPr>
-          <p:cNvPr id="12" name="Shape 10"/>
+          <p:cNvPr id="10" name="Shape 8"/>
           <p:cNvSpPr/>
           <p:nvPr/>
         </p:nvSpPr>
         <p:spPr>
           <a:xfrm>
-            <a:off x="548640" y="3364992"/>
-            <a:ext cx="658368" cy="384048"/>
+            <a:off x="4315968" y="1536192"/>
+            <a:ext cx="3520440" cy="4206240"/>
           </a:xfrm>
           <a:prstGeom prst="roundRect">
             <a:avLst>
-              <a:gd name="adj" fmla="val 14286"/>
+              <a:gd name="adj" fmla="val 1558"/>
             </a:avLst>
+          </a:prstGeom>
+          <a:solidFill>
+            <a:srgbClr val="FCF3E4"/>
+          </a:solidFill>
+          <a:ln w="15240">
+            <a:solidFill>
+              <a:srgbClr val="A06A1B"/>
+            </a:solidFill>
+            <a:prstDash val="solid"/>
+          </a:ln>
+        </p:spPr>
+      </p:sp>
+      <p:sp>
+        <p:nvSpPr>
+          <p:cNvPr id="11" name="Shape 9"/>
+          <p:cNvSpPr/>
+          <p:nvPr/>
+        </p:nvSpPr>
+        <p:spPr>
+          <a:xfrm>
+            <a:off x="4572000" y="1783080"/>
+            <a:ext cx="402336" cy="402336"/>
+          </a:xfrm>
+          <a:prstGeom prst="ellipse">
+            <a:avLst/>
           </a:prstGeom>
           <a:solidFill>
             <a:srgbClr val="A06A1B"/>
@@ -10344,14 +10224,14 @@
       </p:sp>
       <p:sp>
         <p:nvSpPr>
-          <p:cNvPr id="13" name="Text 11"/>
+          <p:cNvPr id="12" name="Text 10"/>
           <p:cNvSpPr txBox="1"/>
           <p:nvPr/>
         </p:nvSpPr>
         <p:spPr>
           <a:xfrm>
-            <a:off x="548640" y="3410712"/>
-            <a:ext cx="658368" cy="292608"/>
+            <a:off x="4572000" y="1819656"/>
+            <a:ext cx="402336" cy="329184"/>
           </a:xfrm>
           <a:prstGeom prst="rect">
             <a:avLst/>
@@ -10367,7 +10247,7 @@
               <a:buNone/>
             </a:pPr>
             <a:r>
-              <a:rPr lang="en-US" sz="1300" b="1" dirty="0">
+              <a:rPr lang="en-US" sz="1500" b="1" dirty="0">
                 <a:solidFill>
                   <a:srgbClr val="FFFFFF"/>
                 </a:solidFill>
@@ -10375,22 +10255,22 @@
                 <a:ea typeface="Calibri" pitchFamily="34" charset="-122"/>
                 <a:cs typeface="Calibri" pitchFamily="34" charset="-120"/>
               </a:rPr>
-              <a:t>中</a:t>
+              <a:t>2</a:t>
             </a:r>
-            <a:endParaRPr lang="en-US" sz="1300" dirty="0"/>
+            <a:endParaRPr lang="en-US" sz="1500" dirty="0"/>
           </a:p>
         </p:txBody>
       </p:sp>
       <p:sp>
         <p:nvSpPr>
-          <p:cNvPr id="14" name="Text 12"/>
+          <p:cNvPr id="13" name="Text 11"/>
           <p:cNvSpPr txBox="1"/>
           <p:nvPr/>
         </p:nvSpPr>
         <p:spPr>
           <a:xfrm>
-            <a:off x="1371600" y="3364992"/>
-            <a:ext cx="10241280" cy="310896"/>
+            <a:off x="5093208" y="1773936"/>
+            <a:ext cx="2606040" cy="457200"/>
           </a:xfrm>
           <a:prstGeom prst="rect">
             <a:avLst/>
@@ -10406,7 +10286,89 @@
               <a:buNone/>
             </a:pPr>
             <a:r>
-              <a:rPr lang="en-US" sz="1400" b="1" dirty="0">
+              <a:rPr lang="en-US" sz="1600" b="1" dirty="0">
+                <a:solidFill>
+                  <a:srgbClr val="A06A1B"/>
+                </a:solidFill>
+                <a:latin typeface="Cambria" pitchFamily="34" charset="0"/>
+                <a:ea typeface="Cambria" pitchFamily="34" charset="-122"/>
+                <a:cs typeface="Cambria" pitchFamily="34" charset="-120"/>
+              </a:rPr>
+              <a:t>林地開発許可</a:t>
+            </a:r>
+            <a:endParaRPr lang="en-US" sz="1600" dirty="0"/>
+          </a:p>
+        </p:txBody>
+      </p:sp>
+      <p:sp>
+        <p:nvSpPr>
+          <p:cNvPr id="14" name="Text 12"/>
+          <p:cNvSpPr txBox="1"/>
+          <p:nvPr/>
+        </p:nvSpPr>
+        <p:spPr>
+          <a:xfrm>
+            <a:off x="4572000" y="2304288"/>
+            <a:ext cx="3017520" cy="365760"/>
+          </a:xfrm>
+          <a:prstGeom prst="rect">
+            <a:avLst/>
+          </a:prstGeom>
+          <a:noFill/>
+          <a:ln/>
+        </p:spPr>
+        <p:txBody>
+          <a:bodyPr wrap="square" lIns="0" tIns="0" rIns="0" bIns="0" rtlCol="0" anchor="t"/>
+          <a:lstStyle/>
+          <a:p>
+            <a:pPr indent="0" marL="0">
+              <a:buNone/>
+            </a:pPr>
+            <a:r>
+              <a:rPr lang="en-US" sz="1050" dirty="0">
+                <a:solidFill>
+                  <a:srgbClr val="6B7A66"/>
+                </a:solidFill>
+                <a:latin typeface="Calibri" pitchFamily="34" charset="0"/>
+                <a:ea typeface="Calibri" pitchFamily="34" charset="-122"/>
+                <a:cs typeface="Calibri" pitchFamily="34" charset="-120"/>
+              </a:rPr>
+              <a:t>森林法 第10条の2</a:t>
+            </a:r>
+            <a:endParaRPr lang="en-US" sz="1050" dirty="0"/>
+          </a:p>
+        </p:txBody>
+      </p:sp>
+      <p:sp>
+        <p:nvSpPr>
+          <p:cNvPr id="15" name="Text 13"/>
+          <p:cNvSpPr txBox="1"/>
+          <p:nvPr/>
+        </p:nvSpPr>
+        <p:spPr>
+          <a:xfrm>
+            <a:off x="4572000" y="2697480"/>
+            <a:ext cx="3017520" cy="2834640"/>
+          </a:xfrm>
+          <a:prstGeom prst="rect">
+            <a:avLst/>
+          </a:prstGeom>
+          <a:noFill/>
+          <a:ln/>
+        </p:spPr>
+        <p:txBody>
+          <a:bodyPr wrap="square" lIns="0" tIns="0" rIns="0" bIns="0" rtlCol="0" anchor="t"/>
+          <a:lstStyle/>
+          <a:p>
+            <a:pPr marL="342900" indent="-342900">
+              <a:spcAft>
+                <a:spcPts val="900"/>
+              </a:spcAft>
+              <a:buSzPct val="100000"/>
+              <a:buChar char="•"/>
+            </a:pPr>
+            <a:r>
+              <a:rPr lang="en-US" sz="1100" dirty="0">
                 <a:solidFill>
                   <a:srgbClr val="222B22"/>
                 </a:solidFill>
@@ -10414,22 +10376,176 @@
                 <a:ea typeface="Calibri" pitchFamily="34" charset="-122"/>
                 <a:cs typeface="Calibri" pitchFamily="34" charset="-120"/>
               </a:rPr>
-              <a:t>林地開発許可の取得期間</a:t>
+              <a:t>地域森林計画対象民有林で1ha超の開発に必要。</a:t>
             </a:r>
-            <a:endParaRPr lang="en-US" sz="1400" dirty="0"/>
+            <a:endParaRPr lang="en-US" sz="1100" dirty="0"/>
+          </a:p>
+          <a:p>
+            <a:pPr marL="342900" indent="-342900">
+              <a:spcAft>
+                <a:spcPts val="900"/>
+              </a:spcAft>
+              <a:buSzPct val="100000"/>
+              <a:buChar char="•"/>
+            </a:pPr>
+            <a:r>
+              <a:rPr lang="en-US" sz="1100" dirty="0">
+                <a:solidFill>
+                  <a:srgbClr val="222B22"/>
+                </a:solidFill>
+                <a:latin typeface="Calibri" pitchFamily="34" charset="0"/>
+                <a:ea typeface="Calibri" pitchFamily="34" charset="-122"/>
+                <a:cs typeface="Calibri" pitchFamily="34" charset="-120"/>
+              </a:rPr>
+              <a:t>検討面積 42,992.45㎡＝約4.3ha のため確実に対象。</a:t>
+            </a:r>
+            <a:endParaRPr lang="en-US" sz="1100" dirty="0"/>
+          </a:p>
+          <a:p>
+            <a:pPr marL="342900" indent="-342900">
+              <a:spcAft>
+                <a:spcPts val="900"/>
+              </a:spcAft>
+              <a:buSzPct val="100000"/>
+              <a:buChar char="•"/>
+            </a:pPr>
+            <a:r>
+              <a:rPr lang="en-US" sz="1100" dirty="0">
+                <a:solidFill>
+                  <a:srgbClr val="222B22"/>
+                </a:solidFill>
+                <a:latin typeface="Calibri" pitchFamily="34" charset="0"/>
+                <a:ea typeface="Calibri" pitchFamily="34" charset="-122"/>
+                <a:cs typeface="Calibri" pitchFamily="34" charset="-120"/>
+              </a:rPr>
+              <a:t>防災・環境の4要件審査。標準処理期間は数か月規模。</a:t>
+            </a:r>
+            <a:endParaRPr lang="en-US" sz="1100" dirty="0"/>
+          </a:p>
+          <a:p>
+            <a:pPr marL="342900" indent="-342900">
+              <a:spcAft>
+                <a:spcPts val="900"/>
+              </a:spcAft>
+              <a:buSzPct val="100000"/>
+              <a:buChar char="•"/>
+            </a:pPr>
+            <a:r>
+              <a:rPr lang="en-US" sz="1100" dirty="0">
+                <a:solidFill>
+                  <a:srgbClr val="222B22"/>
+                </a:solidFill>
+                <a:latin typeface="Calibri" pitchFamily="34" charset="0"/>
+                <a:ea typeface="Calibri" pitchFamily="34" charset="-122"/>
+                <a:cs typeface="Calibri" pitchFamily="34" charset="-120"/>
+              </a:rPr>
+              <a:t>許可権者：愛知県知事</a:t>
+            </a:r>
+            <a:endParaRPr lang="en-US" sz="1100" dirty="0"/>
           </a:p>
         </p:txBody>
       </p:sp>
       <p:sp>
         <p:nvSpPr>
-          <p:cNvPr id="15" name="Text 13"/>
+          <p:cNvPr id="16" name="Shape 14"/>
+          <p:cNvSpPr/>
+          <p:nvPr/>
+        </p:nvSpPr>
+        <p:spPr>
+          <a:xfrm>
+            <a:off x="8083296" y="1536192"/>
+            <a:ext cx="3520440" cy="4206240"/>
+          </a:xfrm>
+          <a:prstGeom prst="roundRect">
+            <a:avLst>
+              <a:gd name="adj" fmla="val 1558"/>
+            </a:avLst>
+          </a:prstGeom>
+          <a:solidFill>
+            <a:srgbClr val="EDF2E6"/>
+          </a:solidFill>
+          <a:ln w="15240">
+            <a:solidFill>
+              <a:srgbClr val="2C5F2D"/>
+            </a:solidFill>
+            <a:prstDash val="solid"/>
+          </a:ln>
+        </p:spPr>
+      </p:sp>
+      <p:sp>
+        <p:nvSpPr>
+          <p:cNvPr id="17" name="Shape 15"/>
+          <p:cNvSpPr/>
+          <p:nvPr/>
+        </p:nvSpPr>
+        <p:spPr>
+          <a:xfrm>
+            <a:off x="8339328" y="1783080"/>
+            <a:ext cx="402336" cy="402336"/>
+          </a:xfrm>
+          <a:prstGeom prst="ellipse">
+            <a:avLst/>
+          </a:prstGeom>
+          <a:solidFill>
+            <a:srgbClr val="2C5F2D"/>
+          </a:solidFill>
+          <a:ln w="12700">
+            <a:solidFill>
+              <a:srgbClr val="2C5F2D"/>
+            </a:solidFill>
+            <a:prstDash val="solid"/>
+          </a:ln>
+        </p:spPr>
+      </p:sp>
+      <p:sp>
+        <p:nvSpPr>
+          <p:cNvPr id="18" name="Text 16"/>
           <p:cNvSpPr txBox="1"/>
           <p:nvPr/>
         </p:nvSpPr>
         <p:spPr>
           <a:xfrm>
-            <a:off x="1371600" y="3694176"/>
-            <a:ext cx="10241280" cy="457200"/>
+            <a:off x="8339328" y="1819656"/>
+            <a:ext cx="402336" cy="329184"/>
+          </a:xfrm>
+          <a:prstGeom prst="rect">
+            <a:avLst/>
+          </a:prstGeom>
+          <a:noFill/>
+          <a:ln/>
+        </p:spPr>
+        <p:txBody>
+          <a:bodyPr wrap="square" lIns="0" tIns="0" rIns="0" bIns="0" rtlCol="0" anchor="ctr"/>
+          <a:lstStyle/>
+          <a:p>
+            <a:pPr algn="ctr" indent="0" marL="0">
+              <a:buNone/>
+            </a:pPr>
+            <a:r>
+              <a:rPr lang="en-US" sz="1500" b="1" dirty="0">
+                <a:solidFill>
+                  <a:srgbClr val="FFFFFF"/>
+                </a:solidFill>
+                <a:latin typeface="Calibri" pitchFamily="34" charset="0"/>
+                <a:ea typeface="Calibri" pitchFamily="34" charset="-122"/>
+                <a:cs typeface="Calibri" pitchFamily="34" charset="-120"/>
+              </a:rPr>
+              <a:t>3</a:t>
+            </a:r>
+            <a:endParaRPr lang="en-US" sz="1500" dirty="0"/>
+          </a:p>
+        </p:txBody>
+      </p:sp>
+      <p:sp>
+        <p:nvSpPr>
+          <p:cNvPr id="19" name="Text 17"/>
+          <p:cNvSpPr txBox="1"/>
+          <p:nvPr/>
+        </p:nvSpPr>
+        <p:spPr>
+          <a:xfrm>
+            <a:off x="8860536" y="1773936"/>
+            <a:ext cx="2606040" cy="457200"/>
           </a:xfrm>
           <a:prstGeom prst="rect">
             <a:avLst/>
@@ -10445,7 +10561,46 @@
               <a:buNone/>
             </a:pPr>
             <a:r>
-              <a:rPr lang="en-US" sz="1150" dirty="0">
+              <a:rPr lang="en-US" sz="1600" b="1" dirty="0">
+                <a:solidFill>
+                  <a:srgbClr val="2C5F2D"/>
+                </a:solidFill>
+                <a:latin typeface="Cambria" pitchFamily="34" charset="0"/>
+                <a:ea typeface="Cambria" pitchFamily="34" charset="-122"/>
+                <a:cs typeface="Cambria" pitchFamily="34" charset="-120"/>
+              </a:rPr>
+              <a:t>伐採届</a:t>
+            </a:r>
+            <a:endParaRPr lang="en-US" sz="1600" dirty="0"/>
+          </a:p>
+        </p:txBody>
+      </p:sp>
+      <p:sp>
+        <p:nvSpPr>
+          <p:cNvPr id="20" name="Text 18"/>
+          <p:cNvSpPr txBox="1"/>
+          <p:nvPr/>
+        </p:nvSpPr>
+        <p:spPr>
+          <a:xfrm>
+            <a:off x="8339328" y="2304288"/>
+            <a:ext cx="3017520" cy="365760"/>
+          </a:xfrm>
+          <a:prstGeom prst="rect">
+            <a:avLst/>
+          </a:prstGeom>
+          <a:noFill/>
+          <a:ln/>
+        </p:spPr>
+        <p:txBody>
+          <a:bodyPr wrap="square" lIns="0" tIns="0" rIns="0" bIns="0" rtlCol="0" anchor="t"/>
+          <a:lstStyle/>
+          <a:p>
+            <a:pPr indent="0" marL="0">
+              <a:buNone/>
+            </a:pPr>
+            <a:r>
+              <a:rPr lang="en-US" sz="1050" dirty="0">
                 <a:solidFill>
                   <a:srgbClr val="6B7A66"/>
                 </a:solidFill>
@@ -10453,49 +10608,22 @@
                 <a:ea typeface="Calibri" pitchFamily="34" charset="-122"/>
                 <a:cs typeface="Calibri" pitchFamily="34" charset="-120"/>
               </a:rPr>
-              <a:t>約4.3haで確実に対象。防災調整池・緑地の確保が必要（緑地35%・調整池5%想定）。</a:t>
+              <a:t>森林法 第10条の8（伐採及び伐採後の造林の届出）</a:t>
             </a:r>
-            <a:endParaRPr lang="en-US" sz="1150" dirty="0"/>
+            <a:endParaRPr lang="en-US" sz="1050" dirty="0"/>
           </a:p>
         </p:txBody>
       </p:sp>
       <p:sp>
         <p:nvSpPr>
-          <p:cNvPr id="16" name="Shape 14"/>
-          <p:cNvSpPr/>
-          <p:nvPr/>
-        </p:nvSpPr>
-        <p:spPr>
-          <a:xfrm>
-            <a:off x="548640" y="4261104"/>
-            <a:ext cx="658368" cy="384048"/>
-          </a:xfrm>
-          <a:prstGeom prst="roundRect">
-            <a:avLst>
-              <a:gd name="adj" fmla="val 14286"/>
-            </a:avLst>
-          </a:prstGeom>
-          <a:solidFill>
-            <a:srgbClr val="A06A1B"/>
-          </a:solidFill>
-          <a:ln w="12700">
-            <a:solidFill>
-              <a:srgbClr val="A06A1B"/>
-            </a:solidFill>
-            <a:prstDash val="solid"/>
-          </a:ln>
-        </p:spPr>
-      </p:sp>
-      <p:sp>
-        <p:nvSpPr>
-          <p:cNvPr id="17" name="Text 15"/>
+          <p:cNvPr id="21" name="Text 19"/>
           <p:cNvSpPr txBox="1"/>
           <p:nvPr/>
         </p:nvSpPr>
         <p:spPr>
           <a:xfrm>
-            <a:off x="548640" y="4306824"/>
-            <a:ext cx="658368" cy="292608"/>
+            <a:off x="8339328" y="2697480"/>
+            <a:ext cx="3017520" cy="2834640"/>
           </a:xfrm>
           <a:prstGeom prst="rect">
             <a:avLst/>
@@ -10504,53 +10632,18 @@
           <a:ln/>
         </p:spPr>
         <p:txBody>
-          <a:bodyPr wrap="square" lIns="0" tIns="0" rIns="0" bIns="0" rtlCol="0" anchor="ctr"/>
+          <a:bodyPr wrap="square" lIns="0" tIns="0" rIns="0" bIns="0" rtlCol="0" anchor="t"/>
           <a:lstStyle/>
           <a:p>
-            <a:pPr algn="ctr" indent="0" marL="0">
-              <a:buNone/>
+            <a:pPr marL="342900" indent="-342900">
+              <a:spcAft>
+                <a:spcPts val="900"/>
+              </a:spcAft>
+              <a:buSzPct val="100000"/>
+              <a:buChar char="•"/>
             </a:pPr>
             <a:r>
-              <a:rPr lang="en-US" sz="1300" b="1" dirty="0">
-                <a:solidFill>
-                  <a:srgbClr val="FFFFFF"/>
-                </a:solidFill>
-                <a:latin typeface="Calibri" pitchFamily="34" charset="0"/>
-                <a:ea typeface="Calibri" pitchFamily="34" charset="-122"/>
-                <a:cs typeface="Calibri" pitchFamily="34" charset="-120"/>
-              </a:rPr>
-              <a:t>中</a:t>
-            </a:r>
-            <a:endParaRPr lang="en-US" sz="1300" dirty="0"/>
-          </a:p>
-        </p:txBody>
-      </p:sp>
-      <p:sp>
-        <p:nvSpPr>
-          <p:cNvPr id="18" name="Text 16"/>
-          <p:cNvSpPr txBox="1"/>
-          <p:nvPr/>
-        </p:nvSpPr>
-        <p:spPr>
-          <a:xfrm>
-            <a:off x="1371600" y="4261104"/>
-            <a:ext cx="10241280" cy="310896"/>
-          </a:xfrm>
-          <a:prstGeom prst="rect">
-            <a:avLst/>
-          </a:prstGeom>
-          <a:noFill/>
-          <a:ln/>
-        </p:spPr>
-        <p:txBody>
-          <a:bodyPr wrap="square" lIns="0" tIns="0" rIns="0" bIns="0" rtlCol="0" anchor="ctr"/>
-          <a:lstStyle/>
-          <a:p>
-            <a:pPr indent="0" marL="0">
-              <a:buNone/>
-            </a:pPr>
-            <a:r>
-              <a:rPr lang="en-US" sz="1400" b="1" dirty="0">
+              <a:rPr lang="en-US" sz="1100" dirty="0">
                 <a:solidFill>
                   <a:srgbClr val="222B22"/>
                 </a:solidFill>
@@ -10558,143 +10651,20 @@
                 <a:ea typeface="Calibri" pitchFamily="34" charset="-122"/>
                 <a:cs typeface="Calibri" pitchFamily="34" charset="-120"/>
               </a:rPr>
-              <a:t>登記地積と実測面積の乖離</a:t>
+              <a:t>1ha以下の伐採でも市町村への事前届出が必要。</a:t>
             </a:r>
-            <a:endParaRPr lang="en-US" sz="1400" dirty="0"/>
-          </a:p>
-        </p:txBody>
-      </p:sp>
-      <p:sp>
-        <p:nvSpPr>
-          <p:cNvPr id="19" name="Text 17"/>
-          <p:cNvSpPr txBox="1"/>
-          <p:nvPr/>
-        </p:nvSpPr>
-        <p:spPr>
-          <a:xfrm>
-            <a:off x="1371600" y="4590288"/>
-            <a:ext cx="10241280" cy="457200"/>
-          </a:xfrm>
-          <a:prstGeom prst="rect">
-            <a:avLst/>
-          </a:prstGeom>
-          <a:noFill/>
-          <a:ln/>
-        </p:spPr>
-        <p:txBody>
-          <a:bodyPr wrap="square" lIns="0" tIns="0" rIns="0" bIns="0" rtlCol="0" anchor="ctr"/>
-          <a:lstStyle/>
-          <a:p>
-            <a:pPr indent="0" marL="0">
-              <a:buNone/>
+            <a:endParaRPr lang="en-US" sz="1100" dirty="0"/>
+          </a:p>
+          <a:p>
+            <a:pPr marL="342900" indent="-342900">
+              <a:spcAft>
+                <a:spcPts val="900"/>
+              </a:spcAft>
+              <a:buSzPct val="100000"/>
+              <a:buChar char="•"/>
             </a:pPr>
             <a:r>
-              <a:rPr lang="en-US" sz="1150" dirty="0">
-                <a:solidFill>
-                  <a:srgbClr val="6B7A66"/>
-                </a:solidFill>
-                <a:latin typeface="Calibri" pitchFamily="34" charset="0"/>
-                <a:ea typeface="Calibri" pitchFamily="34" charset="-122"/>
-                <a:cs typeface="Calibri" pitchFamily="34" charset="-120"/>
-              </a:rPr>
-              <a:t>27筆の登記地積29,681㎡に対し求積図の実測合計は99,100㎡。用地費・面積前提の再確認が必要。</a:t>
-            </a:r>
-            <a:endParaRPr lang="en-US" sz="1150" dirty="0"/>
-          </a:p>
-        </p:txBody>
-      </p:sp>
-      <p:sp>
-        <p:nvSpPr>
-          <p:cNvPr id="20" name="Shape 18"/>
-          <p:cNvSpPr/>
-          <p:nvPr/>
-        </p:nvSpPr>
-        <p:spPr>
-          <a:xfrm>
-            <a:off x="548640" y="5157216"/>
-            <a:ext cx="658368" cy="384048"/>
-          </a:xfrm>
-          <a:prstGeom prst="roundRect">
-            <a:avLst>
-              <a:gd name="adj" fmla="val 14286"/>
-            </a:avLst>
-          </a:prstGeom>
-          <a:solidFill>
-            <a:srgbClr val="6B7A66"/>
-          </a:solidFill>
-          <a:ln w="12700">
-            <a:solidFill>
-              <a:srgbClr val="6B7A66"/>
-            </a:solidFill>
-            <a:prstDash val="solid"/>
-          </a:ln>
-        </p:spPr>
-      </p:sp>
-      <p:sp>
-        <p:nvSpPr>
-          <p:cNvPr id="21" name="Text 19"/>
-          <p:cNvSpPr txBox="1"/>
-          <p:nvPr/>
-        </p:nvSpPr>
-        <p:spPr>
-          <a:xfrm>
-            <a:off x="548640" y="5202936"/>
-            <a:ext cx="658368" cy="292608"/>
-          </a:xfrm>
-          <a:prstGeom prst="rect">
-            <a:avLst/>
-          </a:prstGeom>
-          <a:noFill/>
-          <a:ln/>
-        </p:spPr>
-        <p:txBody>
-          <a:bodyPr wrap="square" lIns="0" tIns="0" rIns="0" bIns="0" rtlCol="0" anchor="ctr"/>
-          <a:lstStyle/>
-          <a:p>
-            <a:pPr algn="ctr" indent="0" marL="0">
-              <a:buNone/>
-            </a:pPr>
-            <a:r>
-              <a:rPr lang="en-US" sz="1300" b="1" dirty="0">
-                <a:solidFill>
-                  <a:srgbClr val="FFFFFF"/>
-                </a:solidFill>
-                <a:latin typeface="Calibri" pitchFamily="34" charset="0"/>
-                <a:ea typeface="Calibri" pitchFamily="34" charset="-122"/>
-                <a:cs typeface="Calibri" pitchFamily="34" charset="-120"/>
-              </a:rPr>
-              <a:t>低</a:t>
-            </a:r>
-            <a:endParaRPr lang="en-US" sz="1300" dirty="0"/>
-          </a:p>
-        </p:txBody>
-      </p:sp>
-      <p:sp>
-        <p:nvSpPr>
-          <p:cNvPr id="22" name="Text 20"/>
-          <p:cNvSpPr txBox="1"/>
-          <p:nvPr/>
-        </p:nvSpPr>
-        <p:spPr>
-          <a:xfrm>
-            <a:off x="1371600" y="5157216"/>
-            <a:ext cx="10241280" cy="310896"/>
-          </a:xfrm>
-          <a:prstGeom prst="rect">
-            <a:avLst/>
-          </a:prstGeom>
-          <a:noFill/>
-          <a:ln/>
-        </p:spPr>
-        <p:txBody>
-          <a:bodyPr wrap="square" lIns="0" tIns="0" rIns="0" bIns="0" rtlCol="0" anchor="ctr"/>
-          <a:lstStyle/>
-          <a:p>
-            <a:pPr indent="0" marL="0">
-              <a:buNone/>
-            </a:pPr>
-            <a:r>
-              <a:rPr lang="en-US" sz="1400" b="1" dirty="0">
+              <a:rPr lang="en-US" sz="1100" dirty="0">
                 <a:solidFill>
                   <a:srgbClr val="222B22"/>
                 </a:solidFill>
@@ -10702,54 +10672,36 @@
                 <a:ea typeface="Calibri" pitchFamily="34" charset="-122"/>
                 <a:cs typeface="Calibri" pitchFamily="34" charset="-120"/>
               </a:rPr>
-              <a:t>公開GISでの事前確認が効かない</a:t>
+              <a:t>伐採90〜30日前に提出。</a:t>
             </a:r>
-            <a:endParaRPr lang="en-US" sz="1400" dirty="0"/>
-          </a:p>
-        </p:txBody>
-      </p:sp>
-      <p:sp>
-        <p:nvSpPr>
-          <p:cNvPr id="23" name="Text 21"/>
-          <p:cNvSpPr txBox="1"/>
-          <p:nvPr/>
-        </p:nvSpPr>
-        <p:spPr>
-          <a:xfrm>
-            <a:off x="1371600" y="5486400"/>
-            <a:ext cx="10241280" cy="457200"/>
-          </a:xfrm>
-          <a:prstGeom prst="rect">
-            <a:avLst/>
-          </a:prstGeom>
-          <a:noFill/>
-          <a:ln/>
-        </p:spPr>
-        <p:txBody>
-          <a:bodyPr wrap="square" lIns="0" tIns="0" rIns="0" bIns="0" rtlCol="0" anchor="ctr"/>
-          <a:lstStyle/>
-          <a:p>
-            <a:pPr indent="0" marL="0">
-              <a:buNone/>
+            <a:endParaRPr lang="en-US" sz="1100" dirty="0"/>
+          </a:p>
+          <a:p>
+            <a:pPr marL="342900" indent="-342900">
+              <a:spcAft>
+                <a:spcPts val="900"/>
+              </a:spcAft>
+              <a:buSzPct val="100000"/>
+              <a:buChar char="•"/>
             </a:pPr>
             <a:r>
-              <a:rPr lang="en-US" sz="1150" dirty="0">
+              <a:rPr lang="en-US" sz="1100" dirty="0">
                 <a:solidFill>
-                  <a:srgbClr val="6B7A66"/>
+                  <a:srgbClr val="222B22"/>
                 </a:solidFill>
                 <a:latin typeface="Calibri" pitchFamily="34" charset="0"/>
                 <a:ea typeface="Calibri" pitchFamily="34" charset="-122"/>
                 <a:cs typeface="Calibri" pitchFamily="34" charset="-120"/>
               </a:rPr>
-              <a:t>愛知県は保安林レイヤを公開していない。県への直接照会が唯一の確定手段。</a:t>
+              <a:t>届出先：岡崎市 林務担当</a:t>
             </a:r>
-            <a:endParaRPr lang="en-US" sz="1150" dirty="0"/>
+            <a:endParaRPr lang="en-US" sz="1100" dirty="0"/>
           </a:p>
         </p:txBody>
       </p:sp>
       <p:sp>
         <p:nvSpPr>
-          <p:cNvPr id="24" name="Text 22"/>
+          <p:cNvPr id="22" name="Text 20"/>
           <p:cNvSpPr txBox="1"/>
           <p:nvPr/>
         </p:nvSpPr>
@@ -10780,7 +10732,7 @@
                 <a:ea typeface="Calibri" pitchFamily="34" charset="-122"/>
                 <a:cs typeface="Calibri" pitchFamily="34" charset="-120"/>
               </a:rPr>
-              <a:t>リスク度は当社DD基準による暫定評価。県照会の結果で更新する。</a:t>
+              <a:t>太陽光は0.5ha超で林地開発許可の対象。蓄電所は「その他」区分で1ha超が基準。</a:t>
             </a:r>
             <a:endParaRPr lang="en-US" sz="950" dirty="0"/>
           </a:p>
@@ -10851,6 +10803,875 @@
                 <a:ea typeface="Cambria" pitchFamily="34" charset="-122"/>
                 <a:cs typeface="Cambria" pitchFamily="34" charset="-120"/>
               </a:rPr>
+              <a:t>リスクと検討論点</a:t>
+            </a:r>
+            <a:endParaRPr lang="en-US" sz="3200" dirty="0"/>
+          </a:p>
+        </p:txBody>
+      </p:sp>
+      <p:sp>
+        <p:nvSpPr>
+          <p:cNvPr id="3" name="Text 1"/>
+          <p:cNvSpPr txBox="1"/>
+          <p:nvPr/>
+        </p:nvSpPr>
+        <p:spPr>
+          <a:xfrm>
+            <a:off x="566928" y="1051560"/>
+            <a:ext cx="10607040" cy="310896"/>
+          </a:xfrm>
+          <a:prstGeom prst="rect">
+            <a:avLst/>
+          </a:prstGeom>
+          <a:noFill/>
+          <a:ln/>
+        </p:spPr>
+        <p:txBody>
+          <a:bodyPr wrap="square" lIns="0" tIns="0" rIns="0" bIns="0" rtlCol="0" anchor="ctr"/>
+          <a:lstStyle/>
+          <a:p>
+            <a:pPr indent="0" marL="0">
+              <a:buNone/>
+            </a:pPr>
+            <a:r>
+              <a:rPr lang="en-US" sz="1300" dirty="0">
+                <a:solidFill>
+                  <a:srgbClr val="6B7A66"/>
+                </a:solidFill>
+                <a:latin typeface="Calibri" pitchFamily="34" charset="0"/>
+                <a:ea typeface="Calibri" pitchFamily="34" charset="-122"/>
+                <a:cs typeface="Calibri" pitchFamily="34" charset="-120"/>
+              </a:rPr>
+              <a:t>保安林をどう扱うかで案件成立性が決まる</a:t>
+            </a:r>
+            <a:endParaRPr lang="en-US" sz="1300" dirty="0"/>
+          </a:p>
+        </p:txBody>
+      </p:sp>
+      <p:sp>
+        <p:nvSpPr>
+          <p:cNvPr id="4" name="Shape 2"/>
+          <p:cNvSpPr/>
+          <p:nvPr/>
+        </p:nvSpPr>
+        <p:spPr>
+          <a:xfrm>
+            <a:off x="548640" y="1572768"/>
+            <a:ext cx="658368" cy="384048"/>
+          </a:xfrm>
+          <a:prstGeom prst="roundRect">
+            <a:avLst>
+              <a:gd name="adj" fmla="val 14286"/>
+            </a:avLst>
+          </a:prstGeom>
+          <a:solidFill>
+            <a:srgbClr val="B02A1F"/>
+          </a:solidFill>
+          <a:ln w="12700">
+            <a:solidFill>
+              <a:srgbClr val="B02A1F"/>
+            </a:solidFill>
+            <a:prstDash val="solid"/>
+          </a:ln>
+        </p:spPr>
+      </p:sp>
+      <p:sp>
+        <p:nvSpPr>
+          <p:cNvPr id="5" name="Text 3"/>
+          <p:cNvSpPr txBox="1"/>
+          <p:nvPr/>
+        </p:nvSpPr>
+        <p:spPr>
+          <a:xfrm>
+            <a:off x="548640" y="1618488"/>
+            <a:ext cx="658368" cy="292608"/>
+          </a:xfrm>
+          <a:prstGeom prst="rect">
+            <a:avLst/>
+          </a:prstGeom>
+          <a:noFill/>
+          <a:ln/>
+        </p:spPr>
+        <p:txBody>
+          <a:bodyPr wrap="square" lIns="0" tIns="0" rIns="0" bIns="0" rtlCol="0" anchor="ctr"/>
+          <a:lstStyle/>
+          <a:p>
+            <a:pPr algn="ctr" indent="0" marL="0">
+              <a:buNone/>
+            </a:pPr>
+            <a:r>
+              <a:rPr lang="en-US" sz="1300" b="1" dirty="0">
+                <a:solidFill>
+                  <a:srgbClr val="FFFFFF"/>
+                </a:solidFill>
+                <a:latin typeface="Calibri" pitchFamily="34" charset="0"/>
+                <a:ea typeface="Calibri" pitchFamily="34" charset="-122"/>
+                <a:cs typeface="Calibri" pitchFamily="34" charset="-120"/>
+              </a:rPr>
+              <a:t>高</a:t>
+            </a:r>
+            <a:endParaRPr lang="en-US" sz="1300" dirty="0"/>
+          </a:p>
+        </p:txBody>
+      </p:sp>
+      <p:sp>
+        <p:nvSpPr>
+          <p:cNvPr id="6" name="Text 4"/>
+          <p:cNvSpPr txBox="1"/>
+          <p:nvPr/>
+        </p:nvSpPr>
+        <p:spPr>
+          <a:xfrm>
+            <a:off x="1371600" y="1572768"/>
+            <a:ext cx="10241280" cy="310896"/>
+          </a:xfrm>
+          <a:prstGeom prst="rect">
+            <a:avLst/>
+          </a:prstGeom>
+          <a:noFill/>
+          <a:ln/>
+        </p:spPr>
+        <p:txBody>
+          <a:bodyPr wrap="square" lIns="0" tIns="0" rIns="0" bIns="0" rtlCol="0" anchor="ctr"/>
+          <a:lstStyle/>
+          <a:p>
+            <a:pPr indent="0" marL="0">
+              <a:buNone/>
+            </a:pPr>
+            <a:r>
+              <a:rPr lang="en-US" sz="1400" b="1" dirty="0">
+                <a:solidFill>
+                  <a:srgbClr val="222B22"/>
+                </a:solidFill>
+                <a:latin typeface="Calibri" pitchFamily="34" charset="0"/>
+                <a:ea typeface="Calibri" pitchFamily="34" charset="-122"/>
+                <a:cs typeface="Calibri" pitchFamily="34" charset="-120"/>
+              </a:rPr>
+              <a:t>保安林区域が造成範囲に入る</a:t>
+            </a:r>
+            <a:endParaRPr lang="en-US" sz="1400" dirty="0"/>
+          </a:p>
+        </p:txBody>
+      </p:sp>
+      <p:sp>
+        <p:nvSpPr>
+          <p:cNvPr id="7" name="Text 5"/>
+          <p:cNvSpPr txBox="1"/>
+          <p:nvPr/>
+        </p:nvSpPr>
+        <p:spPr>
+          <a:xfrm>
+            <a:off x="1371600" y="1901952"/>
+            <a:ext cx="10241280" cy="457200"/>
+          </a:xfrm>
+          <a:prstGeom prst="rect">
+            <a:avLst/>
+          </a:prstGeom>
+          <a:noFill/>
+          <a:ln/>
+        </p:spPr>
+        <p:txBody>
+          <a:bodyPr wrap="square" lIns="0" tIns="0" rIns="0" bIns="0" rtlCol="0" anchor="ctr"/>
+          <a:lstStyle/>
+          <a:p>
+            <a:pPr indent="0" marL="0">
+              <a:buNone/>
+            </a:pPr>
+            <a:r>
+              <a:rPr lang="en-US" sz="1150" dirty="0">
+                <a:solidFill>
+                  <a:srgbClr val="6B7A66"/>
+                </a:solidFill>
+                <a:latin typeface="Calibri" pitchFamily="34" charset="0"/>
+                <a:ea typeface="Calibri" pitchFamily="34" charset="-122"/>
+                <a:cs typeface="Calibri" pitchFamily="34" charset="-120"/>
+              </a:rPr>
+              <a:t>15筆・登記地積で約1.82ha。造成レイアウト次第では案件不成立。</a:t>
+            </a:r>
+            <a:endParaRPr lang="en-US" sz="1150" dirty="0"/>
+          </a:p>
+        </p:txBody>
+      </p:sp>
+      <p:sp>
+        <p:nvSpPr>
+          <p:cNvPr id="8" name="Shape 6"/>
+          <p:cNvSpPr/>
+          <p:nvPr/>
+        </p:nvSpPr>
+        <p:spPr>
+          <a:xfrm>
+            <a:off x="548640" y="2468880"/>
+            <a:ext cx="658368" cy="384048"/>
+          </a:xfrm>
+          <a:prstGeom prst="roundRect">
+            <a:avLst>
+              <a:gd name="adj" fmla="val 14286"/>
+            </a:avLst>
+          </a:prstGeom>
+          <a:solidFill>
+            <a:srgbClr val="B02A1F"/>
+          </a:solidFill>
+          <a:ln w="12700">
+            <a:solidFill>
+              <a:srgbClr val="B02A1F"/>
+            </a:solidFill>
+            <a:prstDash val="solid"/>
+          </a:ln>
+        </p:spPr>
+      </p:sp>
+      <p:sp>
+        <p:nvSpPr>
+          <p:cNvPr id="9" name="Text 7"/>
+          <p:cNvSpPr txBox="1"/>
+          <p:nvPr/>
+        </p:nvSpPr>
+        <p:spPr>
+          <a:xfrm>
+            <a:off x="548640" y="2514600"/>
+            <a:ext cx="658368" cy="292608"/>
+          </a:xfrm>
+          <a:prstGeom prst="rect">
+            <a:avLst/>
+          </a:prstGeom>
+          <a:noFill/>
+          <a:ln/>
+        </p:spPr>
+        <p:txBody>
+          <a:bodyPr wrap="square" lIns="0" tIns="0" rIns="0" bIns="0" rtlCol="0" anchor="ctr"/>
+          <a:lstStyle/>
+          <a:p>
+            <a:pPr algn="ctr" indent="0" marL="0">
+              <a:buNone/>
+            </a:pPr>
+            <a:r>
+              <a:rPr lang="en-US" sz="1300" b="1" dirty="0">
+                <a:solidFill>
+                  <a:srgbClr val="FFFFFF"/>
+                </a:solidFill>
+                <a:latin typeface="Calibri" pitchFamily="34" charset="0"/>
+                <a:ea typeface="Calibri" pitchFamily="34" charset="-122"/>
+                <a:cs typeface="Calibri" pitchFamily="34" charset="-120"/>
+              </a:rPr>
+              <a:t>高</a:t>
+            </a:r>
+            <a:endParaRPr lang="en-US" sz="1300" dirty="0"/>
+          </a:p>
+        </p:txBody>
+      </p:sp>
+      <p:sp>
+        <p:nvSpPr>
+          <p:cNvPr id="10" name="Text 8"/>
+          <p:cNvSpPr txBox="1"/>
+          <p:nvPr/>
+        </p:nvSpPr>
+        <p:spPr>
+          <a:xfrm>
+            <a:off x="1371600" y="2468880"/>
+            <a:ext cx="10241280" cy="310896"/>
+          </a:xfrm>
+          <a:prstGeom prst="rect">
+            <a:avLst/>
+          </a:prstGeom>
+          <a:noFill/>
+          <a:ln/>
+        </p:spPr>
+        <p:txBody>
+          <a:bodyPr wrap="square" lIns="0" tIns="0" rIns="0" bIns="0" rtlCol="0" anchor="ctr"/>
+          <a:lstStyle/>
+          <a:p>
+            <a:pPr indent="0" marL="0">
+              <a:buNone/>
+            </a:pPr>
+            <a:r>
+              <a:rPr lang="en-US" sz="1400" b="1" dirty="0">
+                <a:solidFill>
+                  <a:srgbClr val="222B22"/>
+                </a:solidFill>
+                <a:latin typeface="Calibri" pitchFamily="34" charset="0"/>
+                <a:ea typeface="Calibri" pitchFamily="34" charset="-122"/>
+                <a:cs typeface="Calibri" pitchFamily="34" charset="-120"/>
+              </a:rPr>
+              <a:t>未取得登記簿に追加の保安林がある可能性</a:t>
+            </a:r>
+            <a:endParaRPr lang="en-US" sz="1400" dirty="0"/>
+          </a:p>
+        </p:txBody>
+      </p:sp>
+      <p:sp>
+        <p:nvSpPr>
+          <p:cNvPr id="11" name="Text 9"/>
+          <p:cNvSpPr txBox="1"/>
+          <p:nvPr/>
+        </p:nvSpPr>
+        <p:spPr>
+          <a:xfrm>
+            <a:off x="1371600" y="2798064"/>
+            <a:ext cx="10241280" cy="457200"/>
+          </a:xfrm>
+          <a:prstGeom prst="rect">
+            <a:avLst/>
+          </a:prstGeom>
+          <a:noFill/>
+          <a:ln/>
+        </p:spPr>
+        <p:txBody>
+          <a:bodyPr wrap="square" lIns="0" tIns="0" rIns="0" bIns="0" rtlCol="0" anchor="ctr"/>
+          <a:lstStyle/>
+          <a:p>
+            <a:pPr indent="0" marL="0">
+              <a:buNone/>
+            </a:pPr>
+            <a:r>
+              <a:rPr lang="en-US" sz="1150" dirty="0">
+                <a:solidFill>
+                  <a:srgbClr val="6B7A66"/>
+                </a:solidFill>
+                <a:latin typeface="Calibri" pitchFamily="34" charset="0"/>
+                <a:ea typeface="Calibri" pitchFamily="34" charset="-122"/>
+                <a:cs typeface="Calibri" pitchFamily="34" charset="-120"/>
+              </a:rPr>
+              <a:t>案件地60筆のうち33筆・約4.59haが地目未確認。保安林確定分（2.86ha）より広い。全筆の地目確認が必須。</a:t>
+            </a:r>
+            <a:endParaRPr lang="en-US" sz="1150" dirty="0"/>
+          </a:p>
+        </p:txBody>
+      </p:sp>
+      <p:sp>
+        <p:nvSpPr>
+          <p:cNvPr id="12" name="Shape 10"/>
+          <p:cNvSpPr/>
+          <p:nvPr/>
+        </p:nvSpPr>
+        <p:spPr>
+          <a:xfrm>
+            <a:off x="548640" y="3364992"/>
+            <a:ext cx="658368" cy="384048"/>
+          </a:xfrm>
+          <a:prstGeom prst="roundRect">
+            <a:avLst>
+              <a:gd name="adj" fmla="val 14286"/>
+            </a:avLst>
+          </a:prstGeom>
+          <a:solidFill>
+            <a:srgbClr val="A06A1B"/>
+          </a:solidFill>
+          <a:ln w="12700">
+            <a:solidFill>
+              <a:srgbClr val="A06A1B"/>
+            </a:solidFill>
+            <a:prstDash val="solid"/>
+          </a:ln>
+        </p:spPr>
+      </p:sp>
+      <p:sp>
+        <p:nvSpPr>
+          <p:cNvPr id="13" name="Text 11"/>
+          <p:cNvSpPr txBox="1"/>
+          <p:nvPr/>
+        </p:nvSpPr>
+        <p:spPr>
+          <a:xfrm>
+            <a:off x="548640" y="3410712"/>
+            <a:ext cx="658368" cy="292608"/>
+          </a:xfrm>
+          <a:prstGeom prst="rect">
+            <a:avLst/>
+          </a:prstGeom>
+          <a:noFill/>
+          <a:ln/>
+        </p:spPr>
+        <p:txBody>
+          <a:bodyPr wrap="square" lIns="0" tIns="0" rIns="0" bIns="0" rtlCol="0" anchor="ctr"/>
+          <a:lstStyle/>
+          <a:p>
+            <a:pPr algn="ctr" indent="0" marL="0">
+              <a:buNone/>
+            </a:pPr>
+            <a:r>
+              <a:rPr lang="en-US" sz="1300" b="1" dirty="0">
+                <a:solidFill>
+                  <a:srgbClr val="FFFFFF"/>
+                </a:solidFill>
+                <a:latin typeface="Calibri" pitchFamily="34" charset="0"/>
+                <a:ea typeface="Calibri" pitchFamily="34" charset="-122"/>
+                <a:cs typeface="Calibri" pitchFamily="34" charset="-120"/>
+              </a:rPr>
+              <a:t>中</a:t>
+            </a:r>
+            <a:endParaRPr lang="en-US" sz="1300" dirty="0"/>
+          </a:p>
+        </p:txBody>
+      </p:sp>
+      <p:sp>
+        <p:nvSpPr>
+          <p:cNvPr id="14" name="Text 12"/>
+          <p:cNvSpPr txBox="1"/>
+          <p:nvPr/>
+        </p:nvSpPr>
+        <p:spPr>
+          <a:xfrm>
+            <a:off x="1371600" y="3364992"/>
+            <a:ext cx="10241280" cy="310896"/>
+          </a:xfrm>
+          <a:prstGeom prst="rect">
+            <a:avLst/>
+          </a:prstGeom>
+          <a:noFill/>
+          <a:ln/>
+        </p:spPr>
+        <p:txBody>
+          <a:bodyPr wrap="square" lIns="0" tIns="0" rIns="0" bIns="0" rtlCol="0" anchor="ctr"/>
+          <a:lstStyle/>
+          <a:p>
+            <a:pPr indent="0" marL="0">
+              <a:buNone/>
+            </a:pPr>
+            <a:r>
+              <a:rPr lang="en-US" sz="1400" b="1" dirty="0">
+                <a:solidFill>
+                  <a:srgbClr val="222B22"/>
+                </a:solidFill>
+                <a:latin typeface="Calibri" pitchFamily="34" charset="0"/>
+                <a:ea typeface="Calibri" pitchFamily="34" charset="-122"/>
+                <a:cs typeface="Calibri" pitchFamily="34" charset="-120"/>
+              </a:rPr>
+              <a:t>林地開発許可の取得期間</a:t>
+            </a:r>
+            <a:endParaRPr lang="en-US" sz="1400" dirty="0"/>
+          </a:p>
+        </p:txBody>
+      </p:sp>
+      <p:sp>
+        <p:nvSpPr>
+          <p:cNvPr id="15" name="Text 13"/>
+          <p:cNvSpPr txBox="1"/>
+          <p:nvPr/>
+        </p:nvSpPr>
+        <p:spPr>
+          <a:xfrm>
+            <a:off x="1371600" y="3694176"/>
+            <a:ext cx="10241280" cy="457200"/>
+          </a:xfrm>
+          <a:prstGeom prst="rect">
+            <a:avLst/>
+          </a:prstGeom>
+          <a:noFill/>
+          <a:ln/>
+        </p:spPr>
+        <p:txBody>
+          <a:bodyPr wrap="square" lIns="0" tIns="0" rIns="0" bIns="0" rtlCol="0" anchor="ctr"/>
+          <a:lstStyle/>
+          <a:p>
+            <a:pPr indent="0" marL="0">
+              <a:buNone/>
+            </a:pPr>
+            <a:r>
+              <a:rPr lang="en-US" sz="1150" dirty="0">
+                <a:solidFill>
+                  <a:srgbClr val="6B7A66"/>
+                </a:solidFill>
+                <a:latin typeface="Calibri" pitchFamily="34" charset="0"/>
+                <a:ea typeface="Calibri" pitchFamily="34" charset="-122"/>
+                <a:cs typeface="Calibri" pitchFamily="34" charset="-120"/>
+              </a:rPr>
+              <a:t>約4.3haで確実に対象。防災調整池・緑地の確保が必要（緑地35%・調整池5%想定）。</a:t>
+            </a:r>
+            <a:endParaRPr lang="en-US" sz="1150" dirty="0"/>
+          </a:p>
+        </p:txBody>
+      </p:sp>
+      <p:sp>
+        <p:nvSpPr>
+          <p:cNvPr id="16" name="Shape 14"/>
+          <p:cNvSpPr/>
+          <p:nvPr/>
+        </p:nvSpPr>
+        <p:spPr>
+          <a:xfrm>
+            <a:off x="548640" y="4261104"/>
+            <a:ext cx="658368" cy="384048"/>
+          </a:xfrm>
+          <a:prstGeom prst="roundRect">
+            <a:avLst>
+              <a:gd name="adj" fmla="val 14286"/>
+            </a:avLst>
+          </a:prstGeom>
+          <a:solidFill>
+            <a:srgbClr val="A06A1B"/>
+          </a:solidFill>
+          <a:ln w="12700">
+            <a:solidFill>
+              <a:srgbClr val="A06A1B"/>
+            </a:solidFill>
+            <a:prstDash val="solid"/>
+          </a:ln>
+        </p:spPr>
+      </p:sp>
+      <p:sp>
+        <p:nvSpPr>
+          <p:cNvPr id="17" name="Text 15"/>
+          <p:cNvSpPr txBox="1"/>
+          <p:nvPr/>
+        </p:nvSpPr>
+        <p:spPr>
+          <a:xfrm>
+            <a:off x="548640" y="4306824"/>
+            <a:ext cx="658368" cy="292608"/>
+          </a:xfrm>
+          <a:prstGeom prst="rect">
+            <a:avLst/>
+          </a:prstGeom>
+          <a:noFill/>
+          <a:ln/>
+        </p:spPr>
+        <p:txBody>
+          <a:bodyPr wrap="square" lIns="0" tIns="0" rIns="0" bIns="0" rtlCol="0" anchor="ctr"/>
+          <a:lstStyle/>
+          <a:p>
+            <a:pPr algn="ctr" indent="0" marL="0">
+              <a:buNone/>
+            </a:pPr>
+            <a:r>
+              <a:rPr lang="en-US" sz="1300" b="1" dirty="0">
+                <a:solidFill>
+                  <a:srgbClr val="FFFFFF"/>
+                </a:solidFill>
+                <a:latin typeface="Calibri" pitchFamily="34" charset="0"/>
+                <a:ea typeface="Calibri" pitchFamily="34" charset="-122"/>
+                <a:cs typeface="Calibri" pitchFamily="34" charset="-120"/>
+              </a:rPr>
+              <a:t>中</a:t>
+            </a:r>
+            <a:endParaRPr lang="en-US" sz="1300" dirty="0"/>
+          </a:p>
+        </p:txBody>
+      </p:sp>
+      <p:sp>
+        <p:nvSpPr>
+          <p:cNvPr id="18" name="Text 16"/>
+          <p:cNvSpPr txBox="1"/>
+          <p:nvPr/>
+        </p:nvSpPr>
+        <p:spPr>
+          <a:xfrm>
+            <a:off x="1371600" y="4261104"/>
+            <a:ext cx="10241280" cy="310896"/>
+          </a:xfrm>
+          <a:prstGeom prst="rect">
+            <a:avLst/>
+          </a:prstGeom>
+          <a:noFill/>
+          <a:ln/>
+        </p:spPr>
+        <p:txBody>
+          <a:bodyPr wrap="square" lIns="0" tIns="0" rIns="0" bIns="0" rtlCol="0" anchor="ctr"/>
+          <a:lstStyle/>
+          <a:p>
+            <a:pPr indent="0" marL="0">
+              <a:buNone/>
+            </a:pPr>
+            <a:r>
+              <a:rPr lang="en-US" sz="1400" b="1" dirty="0">
+                <a:solidFill>
+                  <a:srgbClr val="222B22"/>
+                </a:solidFill>
+                <a:latin typeface="Calibri" pitchFamily="34" charset="0"/>
+                <a:ea typeface="Calibri" pitchFamily="34" charset="-122"/>
+                <a:cs typeface="Calibri" pitchFamily="34" charset="-120"/>
+              </a:rPr>
+              <a:t>登記地積と実測面積の乖離</a:t>
+            </a:r>
+            <a:endParaRPr lang="en-US" sz="1400" dirty="0"/>
+          </a:p>
+        </p:txBody>
+      </p:sp>
+      <p:sp>
+        <p:nvSpPr>
+          <p:cNvPr id="19" name="Text 17"/>
+          <p:cNvSpPr txBox="1"/>
+          <p:nvPr/>
+        </p:nvSpPr>
+        <p:spPr>
+          <a:xfrm>
+            <a:off x="1371600" y="4590288"/>
+            <a:ext cx="10241280" cy="457200"/>
+          </a:xfrm>
+          <a:prstGeom prst="rect">
+            <a:avLst/>
+          </a:prstGeom>
+          <a:noFill/>
+          <a:ln/>
+        </p:spPr>
+        <p:txBody>
+          <a:bodyPr wrap="square" lIns="0" tIns="0" rIns="0" bIns="0" rtlCol="0" anchor="ctr"/>
+          <a:lstStyle/>
+          <a:p>
+            <a:pPr indent="0" marL="0">
+              <a:buNone/>
+            </a:pPr>
+            <a:r>
+              <a:rPr lang="en-US" sz="1150" dirty="0">
+                <a:solidFill>
+                  <a:srgbClr val="6B7A66"/>
+                </a:solidFill>
+                <a:latin typeface="Calibri" pitchFamily="34" charset="0"/>
+                <a:ea typeface="Calibri" pitchFamily="34" charset="-122"/>
+                <a:cs typeface="Calibri" pitchFamily="34" charset="-120"/>
+              </a:rPr>
+              <a:t>27筆の登記地積29,681㎡に対し求積図の実測合計は99,100㎡。用地費・面積前提の再確認が必要。</a:t>
+            </a:r>
+            <a:endParaRPr lang="en-US" sz="1150" dirty="0"/>
+          </a:p>
+        </p:txBody>
+      </p:sp>
+      <p:sp>
+        <p:nvSpPr>
+          <p:cNvPr id="20" name="Shape 18"/>
+          <p:cNvSpPr/>
+          <p:nvPr/>
+        </p:nvSpPr>
+        <p:spPr>
+          <a:xfrm>
+            <a:off x="548640" y="5157216"/>
+            <a:ext cx="658368" cy="384048"/>
+          </a:xfrm>
+          <a:prstGeom prst="roundRect">
+            <a:avLst>
+              <a:gd name="adj" fmla="val 14286"/>
+            </a:avLst>
+          </a:prstGeom>
+          <a:solidFill>
+            <a:srgbClr val="6B7A66"/>
+          </a:solidFill>
+          <a:ln w="12700">
+            <a:solidFill>
+              <a:srgbClr val="6B7A66"/>
+            </a:solidFill>
+            <a:prstDash val="solid"/>
+          </a:ln>
+        </p:spPr>
+      </p:sp>
+      <p:sp>
+        <p:nvSpPr>
+          <p:cNvPr id="21" name="Text 19"/>
+          <p:cNvSpPr txBox="1"/>
+          <p:nvPr/>
+        </p:nvSpPr>
+        <p:spPr>
+          <a:xfrm>
+            <a:off x="548640" y="5202936"/>
+            <a:ext cx="658368" cy="292608"/>
+          </a:xfrm>
+          <a:prstGeom prst="rect">
+            <a:avLst/>
+          </a:prstGeom>
+          <a:noFill/>
+          <a:ln/>
+        </p:spPr>
+        <p:txBody>
+          <a:bodyPr wrap="square" lIns="0" tIns="0" rIns="0" bIns="0" rtlCol="0" anchor="ctr"/>
+          <a:lstStyle/>
+          <a:p>
+            <a:pPr algn="ctr" indent="0" marL="0">
+              <a:buNone/>
+            </a:pPr>
+            <a:r>
+              <a:rPr lang="en-US" sz="1300" b="1" dirty="0">
+                <a:solidFill>
+                  <a:srgbClr val="FFFFFF"/>
+                </a:solidFill>
+                <a:latin typeface="Calibri" pitchFamily="34" charset="0"/>
+                <a:ea typeface="Calibri" pitchFamily="34" charset="-122"/>
+                <a:cs typeface="Calibri" pitchFamily="34" charset="-120"/>
+              </a:rPr>
+              <a:t>低</a:t>
+            </a:r>
+            <a:endParaRPr lang="en-US" sz="1300" dirty="0"/>
+          </a:p>
+        </p:txBody>
+      </p:sp>
+      <p:sp>
+        <p:nvSpPr>
+          <p:cNvPr id="22" name="Text 20"/>
+          <p:cNvSpPr txBox="1"/>
+          <p:nvPr/>
+        </p:nvSpPr>
+        <p:spPr>
+          <a:xfrm>
+            <a:off x="1371600" y="5157216"/>
+            <a:ext cx="10241280" cy="310896"/>
+          </a:xfrm>
+          <a:prstGeom prst="rect">
+            <a:avLst/>
+          </a:prstGeom>
+          <a:noFill/>
+          <a:ln/>
+        </p:spPr>
+        <p:txBody>
+          <a:bodyPr wrap="square" lIns="0" tIns="0" rIns="0" bIns="0" rtlCol="0" anchor="ctr"/>
+          <a:lstStyle/>
+          <a:p>
+            <a:pPr indent="0" marL="0">
+              <a:buNone/>
+            </a:pPr>
+            <a:r>
+              <a:rPr lang="en-US" sz="1400" b="1" dirty="0">
+                <a:solidFill>
+                  <a:srgbClr val="222B22"/>
+                </a:solidFill>
+                <a:latin typeface="Calibri" pitchFamily="34" charset="0"/>
+                <a:ea typeface="Calibri" pitchFamily="34" charset="-122"/>
+                <a:cs typeface="Calibri" pitchFamily="34" charset="-120"/>
+              </a:rPr>
+              <a:t>公開GISでの事前確認が効かない</a:t>
+            </a:r>
+            <a:endParaRPr lang="en-US" sz="1400" dirty="0"/>
+          </a:p>
+        </p:txBody>
+      </p:sp>
+      <p:sp>
+        <p:nvSpPr>
+          <p:cNvPr id="23" name="Text 21"/>
+          <p:cNvSpPr txBox="1"/>
+          <p:nvPr/>
+        </p:nvSpPr>
+        <p:spPr>
+          <a:xfrm>
+            <a:off x="1371600" y="5486400"/>
+            <a:ext cx="10241280" cy="457200"/>
+          </a:xfrm>
+          <a:prstGeom prst="rect">
+            <a:avLst/>
+          </a:prstGeom>
+          <a:noFill/>
+          <a:ln/>
+        </p:spPr>
+        <p:txBody>
+          <a:bodyPr wrap="square" lIns="0" tIns="0" rIns="0" bIns="0" rtlCol="0" anchor="ctr"/>
+          <a:lstStyle/>
+          <a:p>
+            <a:pPr indent="0" marL="0">
+              <a:buNone/>
+            </a:pPr>
+            <a:r>
+              <a:rPr lang="en-US" sz="1150" dirty="0">
+                <a:solidFill>
+                  <a:srgbClr val="6B7A66"/>
+                </a:solidFill>
+                <a:latin typeface="Calibri" pitchFamily="34" charset="0"/>
+                <a:ea typeface="Calibri" pitchFamily="34" charset="-122"/>
+                <a:cs typeface="Calibri" pitchFamily="34" charset="-120"/>
+              </a:rPr>
+              <a:t>愛知県は保安林レイヤを公開していない。県への直接照会が唯一の確定手段。</a:t>
+            </a:r>
+            <a:endParaRPr lang="en-US" sz="1150" dirty="0"/>
+          </a:p>
+        </p:txBody>
+      </p:sp>
+      <p:sp>
+        <p:nvSpPr>
+          <p:cNvPr id="24" name="Text 22"/>
+          <p:cNvSpPr txBox="1"/>
+          <p:nvPr/>
+        </p:nvSpPr>
+        <p:spPr>
+          <a:xfrm>
+            <a:off x="548640" y="6327648"/>
+            <a:ext cx="11064240" cy="274320"/>
+          </a:xfrm>
+          <a:prstGeom prst="rect">
+            <a:avLst/>
+          </a:prstGeom>
+          <a:noFill/>
+          <a:ln/>
+        </p:spPr>
+        <p:txBody>
+          <a:bodyPr wrap="square" lIns="0" tIns="0" rIns="0" bIns="0" rtlCol="0" anchor="ctr"/>
+          <a:lstStyle/>
+          <a:p>
+            <a:pPr indent="0" marL="0">
+              <a:buNone/>
+            </a:pPr>
+            <a:r>
+              <a:rPr lang="en-US" sz="950" dirty="0">
+                <a:solidFill>
+                  <a:srgbClr val="6B7A66"/>
+                </a:solidFill>
+                <a:latin typeface="Calibri" pitchFamily="34" charset="0"/>
+                <a:ea typeface="Calibri" pitchFamily="34" charset="-122"/>
+                <a:cs typeface="Calibri" pitchFamily="34" charset="-120"/>
+              </a:rPr>
+              <a:t>リスク度は当社DD基準による暫定評価。県照会の結果で更新する。</a:t>
+            </a:r>
+            <a:endParaRPr lang="en-US" sz="950" dirty="0"/>
+          </a:p>
+        </p:txBody>
+      </p:sp>
+    </p:spTree>
+  </p:cSld>
+  <p:clrMapOvr>
+    <a:masterClrMapping/>
+  </p:clrMapOvr>
+</p:sld>
+</file>
+
+<file path=ppt/slides/slide8.xml><?xml version="1.0" encoding="utf-8"?>
+<p:sld xmlns:a="http://schemas.openxmlformats.org/drawingml/2006/main" xmlns:r="http://schemas.openxmlformats.org/officeDocument/2006/relationships" xmlns:p="http://schemas.openxmlformats.org/presentationml/2006/main">
+  <p:cSld name="Slide 8">
+    <p:bg>
+      <p:bgPr>
+        <a:solidFill>
+          <a:srgbClr val="FFFFFF"/>
+        </a:solidFill>
+      </p:bgPr>
+    </p:bg>
+    <p:spTree>
+      <p:nvGrpSpPr>
+        <p:cNvPr id="1" name=""/>
+        <p:cNvGrpSpPr/>
+        <p:nvPr/>
+      </p:nvGrpSpPr>
+      <p:grpSpPr>
+        <a:xfrm>
+          <a:off x="0" y="0"/>
+          <a:ext cx="0" cy="0"/>
+          <a:chOff x="0" y="0"/>
+          <a:chExt cx="0" cy="0"/>
+        </a:xfrm>
+      </p:grpSpPr>
+      <p:sp>
+        <p:nvSpPr>
+          <p:cNvPr id="2" name="Text 0"/>
+          <p:cNvSpPr txBox="1"/>
+          <p:nvPr/>
+        </p:nvSpPr>
+        <p:spPr>
+          <a:xfrm>
+            <a:off x="548640" y="384048"/>
+            <a:ext cx="10607040" cy="658368"/>
+          </a:xfrm>
+          <a:prstGeom prst="rect">
+            <a:avLst/>
+          </a:prstGeom>
+          <a:noFill/>
+          <a:ln/>
+        </p:spPr>
+        <p:txBody>
+          <a:bodyPr wrap="square" lIns="0" tIns="0" rIns="0" bIns="0" rtlCol="0" anchor="ctr"/>
+          <a:lstStyle/>
+          <a:p>
+            <a:pPr indent="0" marL="0">
+              <a:buNone/>
+            </a:pPr>
+            <a:r>
+              <a:rPr lang="en-US" sz="3200" b="1" dirty="0">
+                <a:solidFill>
+                  <a:srgbClr val="1F4620"/>
+                </a:solidFill>
+                <a:latin typeface="Cambria" pitchFamily="34" charset="0"/>
+                <a:ea typeface="Cambria" pitchFamily="34" charset="-122"/>
+                <a:cs typeface="Cambria" pitchFamily="34" charset="-120"/>
+              </a:rPr>
               <a:t>次のアクション</a:t>
             </a:r>
             <a:endParaRPr lang="en-US" sz="3200" dirty="0"/>
@@ -11205,7 +12026,7 @@
                 <a:ea typeface="Calibri" pitchFamily="34" charset="-122"/>
                 <a:cs typeface="Calibri" pitchFamily="34" charset="-120"/>
               </a:rPr>
-              <a:t>未取得筆の登記事項証明書を取得</a:t>
+              <a:t>未取得33筆の登記事項証明書を取得</a:t>
             </a:r>
             <a:endParaRPr lang="en-US" sz="1400" dirty="0"/>
           </a:p>
@@ -11244,7 +12065,7 @@
                 <a:ea typeface="Calibri" pitchFamily="34" charset="-122"/>
                 <a:cs typeface="Calibri" pitchFamily="34" charset="-120"/>
               </a:rPr>
-              <a:t>求積図に載る1番台ほか約30筆の地目を確認し、保安林の全体像を確定させる。</a:t>
+              <a:t>公図で特定した1番台ほか33筆（約4.59ha）の地目を確認し、保安林の全体像を確定させる。</a:t>
             </a:r>
             <a:endParaRPr lang="en-US" sz="1100" dirty="0"/>
           </a:p>

--- a/docs/保安林確認_岡崎市板田町.pptx
+++ b/docs/保安林確認_岡崎市板田町.pptx
@@ -10856,7 +10856,7 @@
         </p:nvSpPr>
         <p:spPr>
           <a:xfrm>
-            <a:off x="548640" y="1572768"/>
+            <a:off x="548640" y="1536192"/>
             <a:ext cx="658368" cy="384048"/>
           </a:xfrm>
           <a:prstGeom prst="roundRect">
@@ -10883,7 +10883,7 @@
         </p:nvSpPr>
         <p:spPr>
           <a:xfrm>
-            <a:off x="548640" y="1618488"/>
+            <a:off x="548640" y="1581912"/>
             <a:ext cx="658368" cy="292608"/>
           </a:xfrm>
           <a:prstGeom prst="rect">
@@ -10922,7 +10922,7 @@
         </p:nvSpPr>
         <p:spPr>
           <a:xfrm>
-            <a:off x="1371600" y="1572768"/>
+            <a:off x="1371600" y="1536192"/>
             <a:ext cx="10241280" cy="310896"/>
           </a:xfrm>
           <a:prstGeom prst="rect">
@@ -10961,7 +10961,7 @@
         </p:nvSpPr>
         <p:spPr>
           <a:xfrm>
-            <a:off x="1371600" y="1901952"/>
+            <a:off x="1371600" y="1865376"/>
             <a:ext cx="10241280" cy="457200"/>
           </a:xfrm>
           <a:prstGeom prst="rect">
@@ -11000,7 +11000,7 @@
         </p:nvSpPr>
         <p:spPr>
           <a:xfrm>
-            <a:off x="548640" y="2468880"/>
+            <a:off x="548640" y="2313432"/>
             <a:ext cx="658368" cy="384048"/>
           </a:xfrm>
           <a:prstGeom prst="roundRect">
@@ -11027,7 +11027,7 @@
         </p:nvSpPr>
         <p:spPr>
           <a:xfrm>
-            <a:off x="548640" y="2514600"/>
+            <a:off x="548640" y="2359152"/>
             <a:ext cx="658368" cy="292608"/>
           </a:xfrm>
           <a:prstGeom prst="rect">
@@ -11066,7 +11066,7 @@
         </p:nvSpPr>
         <p:spPr>
           <a:xfrm>
-            <a:off x="1371600" y="2468880"/>
+            <a:off x="1371600" y="2313432"/>
             <a:ext cx="10241280" cy="310896"/>
           </a:xfrm>
           <a:prstGeom prst="rect">
@@ -11105,7 +11105,7 @@
         </p:nvSpPr>
         <p:spPr>
           <a:xfrm>
-            <a:off x="1371600" y="2798064"/>
+            <a:off x="1371600" y="2642616"/>
             <a:ext cx="10241280" cy="457200"/>
           </a:xfrm>
           <a:prstGeom prst="rect">
@@ -11144,7 +11144,7 @@
         </p:nvSpPr>
         <p:spPr>
           <a:xfrm>
-            <a:off x="548640" y="3364992"/>
+            <a:off x="548640" y="3090672"/>
             <a:ext cx="658368" cy="384048"/>
           </a:xfrm>
           <a:prstGeom prst="roundRect">
@@ -11171,7 +11171,7 @@
         </p:nvSpPr>
         <p:spPr>
           <a:xfrm>
-            <a:off x="548640" y="3410712"/>
+            <a:off x="548640" y="3136392"/>
             <a:ext cx="658368" cy="292608"/>
           </a:xfrm>
           <a:prstGeom prst="rect">
@@ -11210,7 +11210,7 @@
         </p:nvSpPr>
         <p:spPr>
           <a:xfrm>
-            <a:off x="1371600" y="3364992"/>
+            <a:off x="1371600" y="3090672"/>
             <a:ext cx="10241280" cy="310896"/>
           </a:xfrm>
           <a:prstGeom prst="rect">
@@ -11249,7 +11249,7 @@
         </p:nvSpPr>
         <p:spPr>
           <a:xfrm>
-            <a:off x="1371600" y="3694176"/>
+            <a:off x="1371600" y="3419856"/>
             <a:ext cx="10241280" cy="457200"/>
           </a:xfrm>
           <a:prstGeom prst="rect">
@@ -11288,7 +11288,7 @@
         </p:nvSpPr>
         <p:spPr>
           <a:xfrm>
-            <a:off x="548640" y="4261104"/>
+            <a:off x="548640" y="3867912"/>
             <a:ext cx="658368" cy="384048"/>
           </a:xfrm>
           <a:prstGeom prst="roundRect">
@@ -11315,7 +11315,7 @@
         </p:nvSpPr>
         <p:spPr>
           <a:xfrm>
-            <a:off x="548640" y="4306824"/>
+            <a:off x="548640" y="3913632"/>
             <a:ext cx="658368" cy="292608"/>
           </a:xfrm>
           <a:prstGeom prst="rect">
@@ -11354,7 +11354,7 @@
         </p:nvSpPr>
         <p:spPr>
           <a:xfrm>
-            <a:off x="1371600" y="4261104"/>
+            <a:off x="1371600" y="3867912"/>
             <a:ext cx="10241280" cy="310896"/>
           </a:xfrm>
           <a:prstGeom prst="rect">
@@ -11393,7 +11393,7 @@
         </p:nvSpPr>
         <p:spPr>
           <a:xfrm>
-            <a:off x="1371600" y="4590288"/>
+            <a:off x="1371600" y="4197096"/>
             <a:ext cx="10241280" cy="457200"/>
           </a:xfrm>
           <a:prstGeom prst="rect">
@@ -11432,7 +11432,151 @@
         </p:nvSpPr>
         <p:spPr>
           <a:xfrm>
-            <a:off x="548640" y="5157216"/>
+            <a:off x="548640" y="4645152"/>
+            <a:ext cx="658368" cy="384048"/>
+          </a:xfrm>
+          <a:prstGeom prst="roundRect">
+            <a:avLst>
+              <a:gd name="adj" fmla="val 14286"/>
+            </a:avLst>
+          </a:prstGeom>
+          <a:solidFill>
+            <a:srgbClr val="A06A1B"/>
+          </a:solidFill>
+          <a:ln w="12700">
+            <a:solidFill>
+              <a:srgbClr val="A06A1B"/>
+            </a:solidFill>
+            <a:prstDash val="solid"/>
+          </a:ln>
+        </p:spPr>
+      </p:sp>
+      <p:sp>
+        <p:nvSpPr>
+          <p:cNvPr id="21" name="Text 19"/>
+          <p:cNvSpPr txBox="1"/>
+          <p:nvPr/>
+        </p:nvSpPr>
+        <p:spPr>
+          <a:xfrm>
+            <a:off x="548640" y="4690872"/>
+            <a:ext cx="658368" cy="292608"/>
+          </a:xfrm>
+          <a:prstGeom prst="rect">
+            <a:avLst/>
+          </a:prstGeom>
+          <a:noFill/>
+          <a:ln/>
+        </p:spPr>
+        <p:txBody>
+          <a:bodyPr wrap="square" lIns="0" tIns="0" rIns="0" bIns="0" rtlCol="0" anchor="ctr"/>
+          <a:lstStyle/>
+          <a:p>
+            <a:pPr algn="ctr" indent="0" marL="0">
+              <a:buNone/>
+            </a:pPr>
+            <a:r>
+              <a:rPr lang="en-US" sz="1300" b="1" dirty="0">
+                <a:solidFill>
+                  <a:srgbClr val="FFFFFF"/>
+                </a:solidFill>
+                <a:latin typeface="Calibri" pitchFamily="34" charset="0"/>
+                <a:ea typeface="Calibri" pitchFamily="34" charset="-122"/>
+                <a:cs typeface="Calibri" pitchFamily="34" charset="-120"/>
+              </a:rPr>
+              <a:t>中</a:t>
+            </a:r>
+            <a:endParaRPr lang="en-US" sz="1300" dirty="0"/>
+          </a:p>
+        </p:txBody>
+      </p:sp>
+      <p:sp>
+        <p:nvSpPr>
+          <p:cNvPr id="22" name="Text 20"/>
+          <p:cNvSpPr txBox="1"/>
+          <p:nvPr/>
+        </p:nvSpPr>
+        <p:spPr>
+          <a:xfrm>
+            <a:off x="1371600" y="4645152"/>
+            <a:ext cx="10241280" cy="310896"/>
+          </a:xfrm>
+          <a:prstGeom prst="rect">
+            <a:avLst/>
+          </a:prstGeom>
+          <a:noFill/>
+          <a:ln/>
+        </p:spPr>
+        <p:txBody>
+          <a:bodyPr wrap="square" lIns="0" tIns="0" rIns="0" bIns="0" rtlCol="0" anchor="ctr"/>
+          <a:lstStyle/>
+          <a:p>
+            <a:pPr indent="0" marL="0">
+              <a:buNone/>
+            </a:pPr>
+            <a:r>
+              <a:rPr lang="en-US" sz="1400" b="1" dirty="0">
+                <a:solidFill>
+                  <a:srgbClr val="222B22"/>
+                </a:solidFill>
+                <a:latin typeface="Calibri" pitchFamily="34" charset="0"/>
+                <a:ea typeface="Calibri" pitchFamily="34" charset="-122"/>
+                <a:cs typeface="Calibri" pitchFamily="34" charset="-120"/>
+              </a:rPr>
+              <a:t>里道・水路（法定外公共物）が敷地内を通る</a:t>
+            </a:r>
+            <a:endParaRPr lang="en-US" sz="1400" dirty="0"/>
+          </a:p>
+        </p:txBody>
+      </p:sp>
+      <p:sp>
+        <p:nvSpPr>
+          <p:cNvPr id="23" name="Text 21"/>
+          <p:cNvSpPr txBox="1"/>
+          <p:nvPr/>
+        </p:nvSpPr>
+        <p:spPr>
+          <a:xfrm>
+            <a:off x="1371600" y="4974336"/>
+            <a:ext cx="10241280" cy="457200"/>
+          </a:xfrm>
+          <a:prstGeom prst="rect">
+            <a:avLst/>
+          </a:prstGeom>
+          <a:noFill/>
+          <a:ln/>
+        </p:spPr>
+        <p:txBody>
+          <a:bodyPr wrap="square" lIns="0" tIns="0" rIns="0" bIns="0" rtlCol="0" anchor="ctr"/>
+          <a:lstStyle/>
+          <a:p>
+            <a:pPr indent="0" marL="0">
+              <a:buNone/>
+            </a:pPr>
+            <a:r>
+              <a:rPr lang="en-US" sz="1150" dirty="0">
+                <a:solidFill>
+                  <a:srgbClr val="6B7A66"/>
+                </a:solidFill>
+                <a:latin typeface="Calibri" pitchFamily="34" charset="0"/>
+                <a:ea typeface="Calibri" pitchFamily="34" charset="-122"/>
+                <a:cs typeface="Calibri" pitchFamily="34" charset="-120"/>
+              </a:rPr>
+              <a:t>公図に「道」の注記。求積図の道①〜④＝1,481.37㎡が案件地内。用途廃止・払下げを岡崎市と協議する必要がある。</a:t>
+            </a:r>
+            <a:endParaRPr lang="en-US" sz="1150" dirty="0"/>
+          </a:p>
+        </p:txBody>
+      </p:sp>
+      <p:sp>
+        <p:nvSpPr>
+          <p:cNvPr id="24" name="Shape 22"/>
+          <p:cNvSpPr/>
+          <p:nvPr/>
+        </p:nvSpPr>
+        <p:spPr>
+          <a:xfrm>
+            <a:off x="548640" y="5422392"/>
             <a:ext cx="658368" cy="384048"/>
           </a:xfrm>
           <a:prstGeom prst="roundRect">
@@ -11453,13 +11597,13 @@
       </p:sp>
       <p:sp>
         <p:nvSpPr>
-          <p:cNvPr id="21" name="Text 19"/>
+          <p:cNvPr id="25" name="Text 23"/>
           <p:cNvSpPr txBox="1"/>
           <p:nvPr/>
         </p:nvSpPr>
         <p:spPr>
           <a:xfrm>
-            <a:off x="548640" y="5202936"/>
+            <a:off x="548640" y="5468112"/>
             <a:ext cx="658368" cy="292608"/>
           </a:xfrm>
           <a:prstGeom prst="rect">
@@ -11492,13 +11636,13 @@
       </p:sp>
       <p:sp>
         <p:nvSpPr>
-          <p:cNvPr id="22" name="Text 20"/>
+          <p:cNvPr id="26" name="Text 24"/>
           <p:cNvSpPr txBox="1"/>
           <p:nvPr/>
         </p:nvSpPr>
         <p:spPr>
           <a:xfrm>
-            <a:off x="1371600" y="5157216"/>
+            <a:off x="1371600" y="5422392"/>
             <a:ext cx="10241280" cy="310896"/>
           </a:xfrm>
           <a:prstGeom prst="rect">
@@ -11531,13 +11675,13 @@
       </p:sp>
       <p:sp>
         <p:nvSpPr>
-          <p:cNvPr id="23" name="Text 21"/>
+          <p:cNvPr id="27" name="Text 25"/>
           <p:cNvSpPr txBox="1"/>
           <p:nvPr/>
         </p:nvSpPr>
         <p:spPr>
           <a:xfrm>
-            <a:off x="1371600" y="5486400"/>
+            <a:off x="1371600" y="5751576"/>
             <a:ext cx="10241280" cy="457200"/>
           </a:xfrm>
           <a:prstGeom prst="rect">
@@ -11562,7 +11706,7 @@
                 <a:ea typeface="Calibri" pitchFamily="34" charset="-122"/>
                 <a:cs typeface="Calibri" pitchFamily="34" charset="-120"/>
               </a:rPr>
-              <a:t>愛知県は保安林レイヤを公開していない。県への直接照会が唯一の確定手段。</a:t>
+              <a:t>愛知県は保安林レイヤを公開していない。県への直接照会が唯一の確定手段。公図の座標系欄も空欄で、実座標に載せられない。</a:t>
             </a:r>
             <a:endParaRPr lang="en-US" sz="1150" dirty="0"/>
           </a:p>
@@ -11570,7 +11714,7 @@
       </p:sp>
       <p:sp>
         <p:nvSpPr>
-          <p:cNvPr id="24" name="Text 22"/>
+          <p:cNvPr id="28" name="Text 26"/>
           <p:cNvSpPr txBox="1"/>
           <p:nvPr/>
         </p:nvSpPr>
@@ -12236,7 +12380,7 @@
                 <a:ea typeface="Calibri" pitchFamily="34" charset="-122"/>
                 <a:cs typeface="Calibri" pitchFamily="34" charset="-120"/>
               </a:rPr>
-              <a:t>保安林を除いた造成レイアウトの検討</a:t>
+              <a:t>保安林と里道を除いた造成レイアウトの検討</a:t>
             </a:r>
             <a:endParaRPr lang="en-US" sz="1400" dirty="0"/>
           </a:p>
@@ -12275,7 +12419,7 @@
                 <a:ea typeface="Calibri" pitchFamily="34" charset="-122"/>
                 <a:cs typeface="Calibri" pitchFamily="34" charset="-120"/>
               </a:rPr>
-              <a:t>保安林を避けて必要面積が確保できるかを設計側と確認。確保できない場合は案件の継続可否を判断。</a:t>
+              <a:t>保安林を避けて必要面積が確保できるかを設計側と確認。敷地内の里道・水路（求積図の道①〜④＝1,481.37㎡）は岡崎市と用途廃止・払下げを協議する。</a:t>
             </a:r>
             <a:endParaRPr lang="en-US" sz="1100" dirty="0"/>
           </a:p>
